--- a/data/demos/skin-clinic-pr/site/skin-clinic-pr-autoflow.pptx
+++ b/data/demos/skin-clinic-pr/site/skin-clinic-pr-autoflow.pptx
@@ -14,9 +14,12 @@
     <p:sldId id="262" r:id="rId8"/>
     <p:sldId id="263" r:id="rId9"/>
     <p:sldId id="264" r:id="rId10"/>
+    <p:sldId id="265" r:id="rId11"/>
+    <p:sldId id="266" r:id="rId12"/>
+    <p:sldId id="267" r:id="rId13"/>
   </p:sldIdLst>
   <p:notesMasterIdLst>
-    <p:notesMasterId r:id="rId11"/>
+    <p:notesMasterId r:id="rId14"/>
   </p:notesMasterIdLst>
   <p:sldSz cx="9144000" cy="5143500"/>
   <p:notesSz cx="5143500" cy="9144000"/>
@@ -534,6 +537,270 @@
             <a:fld id="{F7021451-1387-4CA6-816F-3879F97B5CBC}" type="slidenum">
               <a:rPr lang="en-US"/>
               <a:t>1</a:t>
+            </a:fld>
+            <a:endParaRPr lang="en-US"/>
+          </a:p>
+        </p:txBody>
+      </p:sp>
+    </p:spTree>
+    <p:extLst>
+      <p:ext uri="{BB962C8B-B14F-4D97-AF65-F5344CB8AC3E}">
+        <p14:creationId xmlns:p14="http://schemas.microsoft.com/office/powerpoint/2010/main" val="1024086991"/>
+      </p:ext>
+    </p:extLst>
+  </p:cSld>
+  <p:clrMapOvr>
+    <a:masterClrMapping/>
+  </p:clrMapOvr>
+</p:notes>
+</file>
+
+<file path=ppt/notesSlides/notesSlide10.xml><?xml version="1.0" encoding="utf-8"?>
+<p:notes xmlns:a="http://schemas.openxmlformats.org/drawingml/2006/main" xmlns:r="http://schemas.openxmlformats.org/officeDocument/2006/relationships" xmlns:p="http://schemas.openxmlformats.org/presentationml/2006/main">
+  <p:cSld>
+    <p:spTree>
+      <p:nvGrpSpPr>
+        <p:cNvPr id="1" name=""/>
+        <p:cNvGrpSpPr/>
+        <p:nvPr/>
+      </p:nvGrpSpPr>
+      <p:grpSpPr>
+        <a:xfrm>
+          <a:off x="0" y="0"/>
+          <a:ext cx="0" cy="0"/>
+          <a:chOff x="0" y="0"/>
+          <a:chExt cx="0" cy="0"/>
+        </a:xfrm>
+      </p:grpSpPr>
+      <p:sp>
+        <p:nvSpPr>
+          <p:cNvPr id="2" name="Slide Image Placeholder 1"/>
+          <p:cNvSpPr>
+            <a:spLocks noGrp="1" noRot="1" noChangeAspect="1"/>
+          </p:cNvSpPr>
+          <p:nvPr>
+            <p:ph type="sldImg"/>
+          </p:nvPr>
+        </p:nvSpPr>
+        <p:spPr/>
+      </p:sp>
+      <p:sp>
+        <p:nvSpPr>
+          <p:cNvPr id="3" name="Notes Placeholder 2"/>
+          <p:cNvSpPr>
+            <a:spLocks noGrp="1"/>
+          </p:cNvSpPr>
+          <p:nvPr>
+            <p:ph type="body" idx="1"/>
+          </p:nvPr>
+        </p:nvSpPr>
+        <p:spPr/>
+        <p:txBody>
+          <a:bodyPr/>
+          <a:lstStyle/>
+          <a:p>
+            <a:r>
+              <a:rPr lang="en-US" dirty="0"/>
+              <a:t/>
+            </a:r>
+            <a:endParaRPr lang="en-US" dirty="0"/>
+          </a:p>
+        </p:txBody>
+      </p:sp>
+      <p:sp>
+        <p:nvSpPr>
+          <p:cNvPr id="4" name="Slide Number Placeholder 3"/>
+          <p:cNvSpPr>
+            <a:spLocks noGrp="1"/>
+          </p:cNvSpPr>
+          <p:nvPr>
+            <p:ph type="sldNum" sz="quarter" idx="10"/>
+          </p:nvPr>
+        </p:nvSpPr>
+        <p:spPr/>
+        <p:txBody>
+          <a:bodyPr/>
+          <a:lstStyle/>
+          <a:p>
+            <a:fld id="{F7021451-1387-4CA6-816F-3879F97B5CBC}" type="slidenum">
+              <a:rPr lang="en-US"/>
+              <a:t>10</a:t>
+            </a:fld>
+            <a:endParaRPr lang="en-US"/>
+          </a:p>
+        </p:txBody>
+      </p:sp>
+    </p:spTree>
+    <p:extLst>
+      <p:ext uri="{BB962C8B-B14F-4D97-AF65-F5344CB8AC3E}">
+        <p14:creationId xmlns:p14="http://schemas.microsoft.com/office/powerpoint/2010/main" val="1024086991"/>
+      </p:ext>
+    </p:extLst>
+  </p:cSld>
+  <p:clrMapOvr>
+    <a:masterClrMapping/>
+  </p:clrMapOvr>
+</p:notes>
+</file>
+
+<file path=ppt/notesSlides/notesSlide11.xml><?xml version="1.0" encoding="utf-8"?>
+<p:notes xmlns:a="http://schemas.openxmlformats.org/drawingml/2006/main" xmlns:r="http://schemas.openxmlformats.org/officeDocument/2006/relationships" xmlns:p="http://schemas.openxmlformats.org/presentationml/2006/main">
+  <p:cSld>
+    <p:spTree>
+      <p:nvGrpSpPr>
+        <p:cNvPr id="1" name=""/>
+        <p:cNvGrpSpPr/>
+        <p:nvPr/>
+      </p:nvGrpSpPr>
+      <p:grpSpPr>
+        <a:xfrm>
+          <a:off x="0" y="0"/>
+          <a:ext cx="0" cy="0"/>
+          <a:chOff x="0" y="0"/>
+          <a:chExt cx="0" cy="0"/>
+        </a:xfrm>
+      </p:grpSpPr>
+      <p:sp>
+        <p:nvSpPr>
+          <p:cNvPr id="2" name="Slide Image Placeholder 1"/>
+          <p:cNvSpPr>
+            <a:spLocks noGrp="1" noRot="1" noChangeAspect="1"/>
+          </p:cNvSpPr>
+          <p:nvPr>
+            <p:ph type="sldImg"/>
+          </p:nvPr>
+        </p:nvSpPr>
+        <p:spPr/>
+      </p:sp>
+      <p:sp>
+        <p:nvSpPr>
+          <p:cNvPr id="3" name="Notes Placeholder 2"/>
+          <p:cNvSpPr>
+            <a:spLocks noGrp="1"/>
+          </p:cNvSpPr>
+          <p:nvPr>
+            <p:ph type="body" idx="1"/>
+          </p:nvPr>
+        </p:nvSpPr>
+        <p:spPr/>
+        <p:txBody>
+          <a:bodyPr/>
+          <a:lstStyle/>
+          <a:p>
+            <a:r>
+              <a:rPr lang="en-US" dirty="0"/>
+              <a:t/>
+            </a:r>
+            <a:endParaRPr lang="en-US" dirty="0"/>
+          </a:p>
+        </p:txBody>
+      </p:sp>
+      <p:sp>
+        <p:nvSpPr>
+          <p:cNvPr id="4" name="Slide Number Placeholder 3"/>
+          <p:cNvSpPr>
+            <a:spLocks noGrp="1"/>
+          </p:cNvSpPr>
+          <p:nvPr>
+            <p:ph type="sldNum" sz="quarter" idx="10"/>
+          </p:nvPr>
+        </p:nvSpPr>
+        <p:spPr/>
+        <p:txBody>
+          <a:bodyPr/>
+          <a:lstStyle/>
+          <a:p>
+            <a:fld id="{F7021451-1387-4CA6-816F-3879F97B5CBC}" type="slidenum">
+              <a:rPr lang="en-US"/>
+              <a:t>11</a:t>
+            </a:fld>
+            <a:endParaRPr lang="en-US"/>
+          </a:p>
+        </p:txBody>
+      </p:sp>
+    </p:spTree>
+    <p:extLst>
+      <p:ext uri="{BB962C8B-B14F-4D97-AF65-F5344CB8AC3E}">
+        <p14:creationId xmlns:p14="http://schemas.microsoft.com/office/powerpoint/2010/main" val="1024086991"/>
+      </p:ext>
+    </p:extLst>
+  </p:cSld>
+  <p:clrMapOvr>
+    <a:masterClrMapping/>
+  </p:clrMapOvr>
+</p:notes>
+</file>
+
+<file path=ppt/notesSlides/notesSlide12.xml><?xml version="1.0" encoding="utf-8"?>
+<p:notes xmlns:a="http://schemas.openxmlformats.org/drawingml/2006/main" xmlns:r="http://schemas.openxmlformats.org/officeDocument/2006/relationships" xmlns:p="http://schemas.openxmlformats.org/presentationml/2006/main">
+  <p:cSld>
+    <p:spTree>
+      <p:nvGrpSpPr>
+        <p:cNvPr id="1" name=""/>
+        <p:cNvGrpSpPr/>
+        <p:nvPr/>
+      </p:nvGrpSpPr>
+      <p:grpSpPr>
+        <a:xfrm>
+          <a:off x="0" y="0"/>
+          <a:ext cx="0" cy="0"/>
+          <a:chOff x="0" y="0"/>
+          <a:chExt cx="0" cy="0"/>
+        </a:xfrm>
+      </p:grpSpPr>
+      <p:sp>
+        <p:nvSpPr>
+          <p:cNvPr id="2" name="Slide Image Placeholder 1"/>
+          <p:cNvSpPr>
+            <a:spLocks noGrp="1" noRot="1" noChangeAspect="1"/>
+          </p:cNvSpPr>
+          <p:nvPr>
+            <p:ph type="sldImg"/>
+          </p:nvPr>
+        </p:nvSpPr>
+        <p:spPr/>
+      </p:sp>
+      <p:sp>
+        <p:nvSpPr>
+          <p:cNvPr id="3" name="Notes Placeholder 2"/>
+          <p:cNvSpPr>
+            <a:spLocks noGrp="1"/>
+          </p:cNvSpPr>
+          <p:nvPr>
+            <p:ph type="body" idx="1"/>
+          </p:nvPr>
+        </p:nvSpPr>
+        <p:spPr/>
+        <p:txBody>
+          <a:bodyPr/>
+          <a:lstStyle/>
+          <a:p>
+            <a:r>
+              <a:rPr lang="en-US" dirty="0"/>
+              <a:t/>
+            </a:r>
+            <a:endParaRPr lang="en-US" dirty="0"/>
+          </a:p>
+        </p:txBody>
+      </p:sp>
+      <p:sp>
+        <p:nvSpPr>
+          <p:cNvPr id="4" name="Slide Number Placeholder 3"/>
+          <p:cNvSpPr>
+            <a:spLocks noGrp="1"/>
+          </p:cNvSpPr>
+          <p:nvPr>
+            <p:ph type="sldNum" sz="quarter" idx="10"/>
+          </p:nvPr>
+        </p:nvSpPr>
+        <p:spPr/>
+        <p:txBody>
+          <a:bodyPr/>
+          <a:lstStyle/>
+          <a:p>
+            <a:fld id="{F7021451-1387-4CA6-816F-3879F97B5CBC}" type="slidenum">
+              <a:rPr lang="en-US"/>
+              <a:t>12</a:t>
             </a:fld>
             <a:endParaRPr lang="en-US"/>
           </a:p>
@@ -1596,7 +1863,7 @@
         <p:spPr>
           <a:xfrm>
             <a:off x="365760" y="4754880"/>
-            <a:ext cx="3657600" cy="274320"/>
+            <a:ext cx="4572000" cy="274320"/>
           </a:xfrm>
           <a:prstGeom prst="rect">
             <a:avLst/>
@@ -1620,7 +1887,7 @@
                 <a:ea typeface="Helvetica" pitchFamily="34" charset="-122"/>
                 <a:cs typeface="Helvetica" pitchFamily="34" charset="-120"/>
               </a:rPr>
-              <a:t>AI Borinquen · AutoFlow</a:t>
+              <a:t>AI Borinquen · AutoFlow · Puerto Rico</a:t>
             </a:r>
             <a:endParaRPr lang="en-US" sz="900" dirty="0"/>
           </a:p>
@@ -1718,7 +1985,7 @@
                 <a:ea typeface="Helvetica" pitchFamily="34" charset="-122"/>
                 <a:cs typeface="Helvetica" pitchFamily="34" charset="-120"/>
               </a:rPr>
-              <a:t>PROPUESTA PERSONALIZADA · 2026-09-19</a:t>
+              <a:t>PROPUESTA PERSONALIZADA · 2026-09-21</a:t>
             </a:r>
             <a:endParaRPr lang="en-US" sz="1000" dirty="0"/>
           </a:p>
@@ -1835,9 +2102,1248 @@
                 <a:ea typeface="Helvetica" pitchFamily="34" charset="-122"/>
                 <a:cs typeface="Helvetica" pitchFamily="34" charset="-120"/>
               </a:rPr>
-              <a:t>Preparado para Dra. Kasey Ruiz</a:t>
+              <a:t>Preparado para Dra. Kasey Ruiz · Hecho en Puerto Rico</a:t>
             </a:r>
             <a:endParaRPr lang="en-US" sz="1200" dirty="0"/>
+          </a:p>
+        </p:txBody>
+      </p:sp>
+    </p:spTree>
+  </p:cSld>
+  <p:clrMapOvr>
+    <a:masterClrMapping/>
+  </p:clrMapOvr>
+</p:sld>
+</file>
+
+<file path=ppt/slides/slide10.xml><?xml version="1.0" encoding="utf-8"?>
+<p:sld xmlns:a="http://schemas.openxmlformats.org/drawingml/2006/main" xmlns:r="http://schemas.openxmlformats.org/officeDocument/2006/relationships" xmlns:p="http://schemas.openxmlformats.org/presentationml/2006/main">
+  <p:cSld name="Slide 10">
+    <p:bg>
+      <p:bgPr>
+        <a:solidFill>
+          <a:srgbClr val="07160F"/>
+        </a:solidFill>
+      </p:bgPr>
+    </p:bg>
+    <p:spTree>
+      <p:nvGrpSpPr>
+        <p:cNvPr id="1" name=""/>
+        <p:cNvGrpSpPr/>
+        <p:nvPr/>
+      </p:nvGrpSpPr>
+      <p:grpSpPr>
+        <a:xfrm>
+          <a:off x="0" y="0"/>
+          <a:ext cx="0" cy="0"/>
+          <a:chOff x="0" y="0"/>
+          <a:chExt cx="0" cy="0"/>
+        </a:xfrm>
+      </p:grpSpPr>
+      <p:sp>
+        <p:nvSpPr>
+          <p:cNvPr id="2" name="Text 0"/>
+          <p:cNvSpPr/>
+          <p:nvPr/>
+        </p:nvSpPr>
+        <p:spPr>
+          <a:xfrm>
+            <a:off x="365760" y="4754880"/>
+            <a:ext cx="4572000" cy="274320"/>
+          </a:xfrm>
+          <a:prstGeom prst="rect">
+            <a:avLst/>
+          </a:prstGeom>
+          <a:noFill/>
+          <a:ln/>
+        </p:spPr>
+        <p:txBody>
+          <a:bodyPr wrap="square" rtlCol="0" anchor="ctr"/>
+          <a:lstStyle/>
+          <a:p>
+            <a:pPr indent="0" marL="0">
+              <a:buNone/>
+            </a:pPr>
+            <a:r>
+              <a:rPr lang="en-US" sz="900" dirty="0">
+                <a:solidFill>
+                  <a:srgbClr val="9DB8AA"/>
+                </a:solidFill>
+                <a:latin typeface="Helvetica" pitchFamily="34" charset="0"/>
+                <a:ea typeface="Helvetica" pitchFamily="34" charset="-122"/>
+                <a:cs typeface="Helvetica" pitchFamily="34" charset="-120"/>
+              </a:rPr>
+              <a:t>AI Borinquen · AutoFlow · Puerto Rico</a:t>
+            </a:r>
+            <a:endParaRPr lang="en-US" sz="900" dirty="0"/>
+          </a:p>
+        </p:txBody>
+      </p:sp>
+      <p:sp>
+        <p:nvSpPr>
+          <p:cNvPr id="3" name="Text 1"/>
+          <p:cNvSpPr/>
+          <p:nvPr/>
+        </p:nvSpPr>
+        <p:spPr>
+          <a:xfrm>
+            <a:off x="5120640" y="4754880"/>
+            <a:ext cx="3657600" cy="274320"/>
+          </a:xfrm>
+          <a:prstGeom prst="rect">
+            <a:avLst/>
+          </a:prstGeom>
+          <a:noFill/>
+          <a:ln/>
+        </p:spPr>
+        <p:txBody>
+          <a:bodyPr wrap="square" rtlCol="0" anchor="ctr"/>
+          <a:lstStyle/>
+          <a:p>
+            <a:pPr algn="r" indent="0" marL="0">
+              <a:buNone/>
+            </a:pPr>
+            <a:r>
+              <a:rPr lang="en-US" sz="900" dirty="0">
+                <a:solidFill>
+                  <a:srgbClr val="9DB8AA"/>
+                </a:solidFill>
+                <a:latin typeface="Helvetica" pitchFamily="34" charset="0"/>
+                <a:ea typeface="Helvetica" pitchFamily="34" charset="-122"/>
+                <a:cs typeface="Helvetica" pitchFamily="34" charset="-120"/>
+              </a:rPr>
+              <a:t>Skin Clinic PR</a:t>
+            </a:r>
+            <a:endParaRPr lang="en-US" sz="900" dirty="0"/>
+          </a:p>
+        </p:txBody>
+      </p:sp>
+      <p:sp>
+        <p:nvSpPr>
+          <p:cNvPr id="4" name="Text 2"/>
+          <p:cNvSpPr/>
+          <p:nvPr/>
+        </p:nvSpPr>
+        <p:spPr>
+          <a:xfrm>
+            <a:off x="457200" y="320040"/>
+            <a:ext cx="8229600" cy="274320"/>
+          </a:xfrm>
+          <a:prstGeom prst="rect">
+            <a:avLst/>
+          </a:prstGeom>
+          <a:noFill/>
+          <a:ln/>
+        </p:spPr>
+        <p:txBody>
+          <a:bodyPr wrap="square" rtlCol="0" anchor="ctr"/>
+          <a:lstStyle/>
+          <a:p>
+            <a:pPr indent="0" marL="0">
+              <a:buNone/>
+            </a:pPr>
+            <a:r>
+              <a:rPr lang="en-US" sz="1000" b="1" spc="300" kern="0" dirty="0">
+                <a:solidFill>
+                  <a:srgbClr val="35C06F"/>
+                </a:solidFill>
+                <a:latin typeface="Helvetica" pitchFamily="34" charset="0"/>
+                <a:ea typeface="Helvetica" pitchFamily="34" charset="-122"/>
+                <a:cs typeface="Helvetica" pitchFamily="34" charset="-120"/>
+              </a:rPr>
+              <a:t>TU EQUIPO DIGITAL</a:t>
+            </a:r>
+            <a:endParaRPr lang="en-US" sz="1000" dirty="0"/>
+          </a:p>
+        </p:txBody>
+      </p:sp>
+      <p:sp>
+        <p:nvSpPr>
+          <p:cNvPr id="5" name="Text 3"/>
+          <p:cNvSpPr/>
+          <p:nvPr/>
+        </p:nvSpPr>
+        <p:spPr>
+          <a:xfrm>
+            <a:off x="457200" y="594360"/>
+            <a:ext cx="8229600" cy="731520"/>
+          </a:xfrm>
+          <a:prstGeom prst="rect">
+            <a:avLst/>
+          </a:prstGeom>
+          <a:noFill/>
+          <a:ln/>
+        </p:spPr>
+        <p:txBody>
+          <a:bodyPr wrap="square" rtlCol="0" anchor="ctr"/>
+          <a:lstStyle/>
+          <a:p>
+            <a:pPr indent="0" marL="0">
+              <a:buNone/>
+            </a:pPr>
+            <a:r>
+              <a:rPr lang="en-US" sz="2800" b="1" dirty="0">
+                <a:solidFill>
+                  <a:srgbClr val="E9F5EE"/>
+                </a:solidFill>
+                <a:latin typeface="Helvetica" pitchFamily="34" charset="0"/>
+                <a:ea typeface="Helvetica" pitchFamily="34" charset="-122"/>
+                <a:cs typeface="Helvetica" pitchFamily="34" charset="-120"/>
+              </a:rPr>
+              <a:t>Elige el agente que necesitas primero</a:t>
+            </a:r>
+            <a:endParaRPr lang="en-US" sz="2800" dirty="0"/>
+          </a:p>
+        </p:txBody>
+      </p:sp>
+      <p:sp>
+        <p:nvSpPr>
+          <p:cNvPr id="6" name="Shape 4"/>
+          <p:cNvSpPr/>
+          <p:nvPr/>
+        </p:nvSpPr>
+        <p:spPr>
+          <a:xfrm>
+            <a:off x="457200" y="1463040"/>
+            <a:ext cx="2651760" cy="2743200"/>
+          </a:xfrm>
+          <a:prstGeom prst="roundRect">
+            <a:avLst>
+              <a:gd name="adj" fmla="val 3448"/>
+            </a:avLst>
+          </a:prstGeom>
+          <a:solidFill>
+            <a:srgbClr val="0D2118"/>
+          </a:solidFill>
+          <a:ln w="12700">
+            <a:solidFill>
+              <a:srgbClr val="1F3A2B"/>
+            </a:solidFill>
+            <a:prstDash val="solid"/>
+          </a:ln>
+        </p:spPr>
+      </p:sp>
+      <p:sp>
+        <p:nvSpPr>
+          <p:cNvPr id="7" name="Text 5"/>
+          <p:cNvSpPr/>
+          <p:nvPr/>
+        </p:nvSpPr>
+        <p:spPr>
+          <a:xfrm>
+            <a:off x="640080" y="1783080"/>
+            <a:ext cx="2286000" cy="548640"/>
+          </a:xfrm>
+          <a:prstGeom prst="rect">
+            <a:avLst/>
+          </a:prstGeom>
+          <a:noFill/>
+          <a:ln/>
+        </p:spPr>
+        <p:txBody>
+          <a:bodyPr wrap="square" rtlCol="0" anchor="ctr"/>
+          <a:lstStyle/>
+          <a:p>
+            <a:pPr indent="0" marL="0">
+              <a:buNone/>
+            </a:pPr>
+            <a:r>
+              <a:rPr lang="en-US" sz="1500" b="1" dirty="0">
+                <a:solidFill>
+                  <a:srgbClr val="E9F5EE"/>
+                </a:solidFill>
+                <a:latin typeface="Helvetica" pitchFamily="34" charset="0"/>
+                <a:ea typeface="Helvetica" pitchFamily="34" charset="-122"/>
+                <a:cs typeface="Helvetica" pitchFamily="34" charset="-120"/>
+              </a:rPr>
+              <a:t>Agente de chat</a:t>
+            </a:r>
+            <a:endParaRPr lang="en-US" sz="1500" dirty="0"/>
+          </a:p>
+        </p:txBody>
+      </p:sp>
+      <p:sp>
+        <p:nvSpPr>
+          <p:cNvPr id="8" name="Text 6"/>
+          <p:cNvSpPr/>
+          <p:nvPr/>
+        </p:nvSpPr>
+        <p:spPr>
+          <a:xfrm>
+            <a:off x="640080" y="2331720"/>
+            <a:ext cx="2286000" cy="365760"/>
+          </a:xfrm>
+          <a:prstGeom prst="rect">
+            <a:avLst/>
+          </a:prstGeom>
+          <a:noFill/>
+          <a:ln/>
+        </p:spPr>
+        <p:txBody>
+          <a:bodyPr wrap="square" rtlCol="0" anchor="ctr"/>
+          <a:lstStyle/>
+          <a:p>
+            <a:pPr indent="0" marL="0">
+              <a:buNone/>
+            </a:pPr>
+            <a:r>
+              <a:rPr lang="en-US" sz="1400" b="1" dirty="0">
+                <a:solidFill>
+                  <a:srgbClr val="9DB8AA"/>
+                </a:solidFill>
+                <a:latin typeface="Helvetica" pitchFamily="34" charset="0"/>
+                <a:ea typeface="Helvetica" pitchFamily="34" charset="-122"/>
+                <a:cs typeface="Helvetica" pitchFamily="34" charset="-120"/>
+              </a:rPr>
+              <a:t>$1,500 + $147/mes</a:t>
+            </a:r>
+            <a:endParaRPr lang="en-US" sz="1400" dirty="0"/>
+          </a:p>
+        </p:txBody>
+      </p:sp>
+      <p:sp>
+        <p:nvSpPr>
+          <p:cNvPr id="9" name="Text 7"/>
+          <p:cNvSpPr/>
+          <p:nvPr/>
+        </p:nvSpPr>
+        <p:spPr>
+          <a:xfrm>
+            <a:off x="640080" y="2743200"/>
+            <a:ext cx="2286000" cy="1371600"/>
+          </a:xfrm>
+          <a:prstGeom prst="rect">
+            <a:avLst/>
+          </a:prstGeom>
+          <a:noFill/>
+          <a:ln/>
+        </p:spPr>
+        <p:txBody>
+          <a:bodyPr wrap="square" rtlCol="0" anchor="t"/>
+          <a:lstStyle/>
+          <a:p>
+            <a:pPr indent="0" marL="0">
+              <a:buNone/>
+            </a:pPr>
+            <a:r>
+              <a:rPr lang="en-US" sz="1100" dirty="0">
+                <a:solidFill>
+                  <a:srgbClr val="9DB8AA"/>
+                </a:solidFill>
+                <a:latin typeface="Helvetica" pitchFamily="34" charset="0"/>
+                <a:ea typeface="Helvetica" pitchFamily="34" charset="-122"/>
+                <a:cs typeface="Helvetica" pitchFamily="34" charset="-120"/>
+              </a:rPr>
+              <a:t>WhatsApp e Instagram atendidos 24/7. Responde, precalifica, toma datos y agenda. CRM incluido.</a:t>
+            </a:r>
+            <a:endParaRPr lang="en-US" sz="1100" dirty="0"/>
+          </a:p>
+        </p:txBody>
+      </p:sp>
+      <p:sp>
+        <p:nvSpPr>
+          <p:cNvPr id="10" name="Shape 8"/>
+          <p:cNvSpPr/>
+          <p:nvPr/>
+        </p:nvSpPr>
+        <p:spPr>
+          <a:xfrm>
+            <a:off x="3291840" y="1463040"/>
+            <a:ext cx="2651760" cy="2743200"/>
+          </a:xfrm>
+          <a:prstGeom prst="roundRect">
+            <a:avLst>
+              <a:gd name="adj" fmla="val 3448"/>
+            </a:avLst>
+          </a:prstGeom>
+          <a:solidFill>
+            <a:srgbClr val="0D2118"/>
+          </a:solidFill>
+          <a:ln w="12700">
+            <a:solidFill>
+              <a:srgbClr val="1F3A2B"/>
+            </a:solidFill>
+            <a:prstDash val="solid"/>
+          </a:ln>
+        </p:spPr>
+      </p:sp>
+      <p:sp>
+        <p:nvSpPr>
+          <p:cNvPr id="11" name="Text 9"/>
+          <p:cNvSpPr/>
+          <p:nvPr/>
+        </p:nvSpPr>
+        <p:spPr>
+          <a:xfrm>
+            <a:off x="3474720" y="1783080"/>
+            <a:ext cx="2286000" cy="548640"/>
+          </a:xfrm>
+          <a:prstGeom prst="rect">
+            <a:avLst/>
+          </a:prstGeom>
+          <a:noFill/>
+          <a:ln/>
+        </p:spPr>
+        <p:txBody>
+          <a:bodyPr wrap="square" rtlCol="0" anchor="ctr"/>
+          <a:lstStyle/>
+          <a:p>
+            <a:pPr indent="0" marL="0">
+              <a:buNone/>
+            </a:pPr>
+            <a:r>
+              <a:rPr lang="en-US" sz="1500" b="1" dirty="0">
+                <a:solidFill>
+                  <a:srgbClr val="E9F5EE"/>
+                </a:solidFill>
+                <a:latin typeface="Helvetica" pitchFamily="34" charset="0"/>
+                <a:ea typeface="Helvetica" pitchFamily="34" charset="-122"/>
+                <a:cs typeface="Helvetica" pitchFamily="34" charset="-120"/>
+              </a:rPr>
+              <a:t>Agente de voz</a:t>
+            </a:r>
+            <a:endParaRPr lang="en-US" sz="1500" dirty="0"/>
+          </a:p>
+        </p:txBody>
+      </p:sp>
+      <p:sp>
+        <p:nvSpPr>
+          <p:cNvPr id="12" name="Text 10"/>
+          <p:cNvSpPr/>
+          <p:nvPr/>
+        </p:nvSpPr>
+        <p:spPr>
+          <a:xfrm>
+            <a:off x="3474720" y="2331720"/>
+            <a:ext cx="2286000" cy="365760"/>
+          </a:xfrm>
+          <a:prstGeom prst="rect">
+            <a:avLst/>
+          </a:prstGeom>
+          <a:noFill/>
+          <a:ln/>
+        </p:spPr>
+        <p:txBody>
+          <a:bodyPr wrap="square" rtlCol="0" anchor="ctr"/>
+          <a:lstStyle/>
+          <a:p>
+            <a:pPr indent="0" marL="0">
+              <a:buNone/>
+            </a:pPr>
+            <a:r>
+              <a:rPr lang="en-US" sz="1400" b="1" dirty="0">
+                <a:solidFill>
+                  <a:srgbClr val="9DB8AA"/>
+                </a:solidFill>
+                <a:latin typeface="Helvetica" pitchFamily="34" charset="0"/>
+                <a:ea typeface="Helvetica" pitchFamily="34" charset="-122"/>
+                <a:cs typeface="Helvetica" pitchFamily="34" charset="-120"/>
+              </a:rPr>
+              <a:t>$2,500 + $297/mes</a:t>
+            </a:r>
+            <a:endParaRPr lang="en-US" sz="1400" dirty="0"/>
+          </a:p>
+        </p:txBody>
+      </p:sp>
+      <p:sp>
+        <p:nvSpPr>
+          <p:cNvPr id="13" name="Text 11"/>
+          <p:cNvSpPr/>
+          <p:nvPr/>
+        </p:nvSpPr>
+        <p:spPr>
+          <a:xfrm>
+            <a:off x="3474720" y="2743200"/>
+            <a:ext cx="2286000" cy="1371600"/>
+          </a:xfrm>
+          <a:prstGeom prst="rect">
+            <a:avLst/>
+          </a:prstGeom>
+          <a:noFill/>
+          <a:ln/>
+        </p:spPr>
+        <p:txBody>
+          <a:bodyPr wrap="square" rtlCol="0" anchor="t"/>
+          <a:lstStyle/>
+          <a:p>
+            <a:pPr indent="0" marL="0">
+              <a:buNone/>
+            </a:pPr>
+            <a:r>
+              <a:rPr lang="en-US" sz="1100" dirty="0">
+                <a:solidFill>
+                  <a:srgbClr val="9DB8AA"/>
+                </a:solidFill>
+                <a:latin typeface="Helvetica" pitchFamily="34" charset="0"/>
+                <a:ea typeface="Helvetica" pitchFamily="34" charset="-122"/>
+                <a:cs typeface="Helvetica" pitchFamily="34" charset="-120"/>
+              </a:rPr>
+              <a:t>Contesta el teléfono con voz de Puerto Rico. Orienta, toma datos y agenda. Escala a tu equipo.</a:t>
+            </a:r>
+            <a:endParaRPr lang="en-US" sz="1100" dirty="0"/>
+          </a:p>
+        </p:txBody>
+      </p:sp>
+      <p:sp>
+        <p:nvSpPr>
+          <p:cNvPr id="14" name="Shape 12"/>
+          <p:cNvSpPr/>
+          <p:nvPr/>
+        </p:nvSpPr>
+        <p:spPr>
+          <a:xfrm>
+            <a:off x="6126480" y="1463040"/>
+            <a:ext cx="2651760" cy="2743200"/>
+          </a:xfrm>
+          <a:prstGeom prst="roundRect">
+            <a:avLst>
+              <a:gd name="adj" fmla="val 3448"/>
+            </a:avLst>
+          </a:prstGeom>
+          <a:solidFill>
+            <a:srgbClr val="0D2118"/>
+          </a:solidFill>
+          <a:ln w="25400">
+            <a:solidFill>
+              <a:srgbClr val="E0A93C"/>
+            </a:solidFill>
+            <a:prstDash val="solid"/>
+          </a:ln>
+        </p:spPr>
+      </p:sp>
+      <p:sp>
+        <p:nvSpPr>
+          <p:cNvPr id="15" name="Text 13"/>
+          <p:cNvSpPr/>
+          <p:nvPr/>
+        </p:nvSpPr>
+        <p:spPr>
+          <a:xfrm>
+            <a:off x="6309360" y="1508760"/>
+            <a:ext cx="2286000" cy="274320"/>
+          </a:xfrm>
+          <a:prstGeom prst="rect">
+            <a:avLst/>
+          </a:prstGeom>
+          <a:noFill/>
+          <a:ln/>
+        </p:spPr>
+        <p:txBody>
+          <a:bodyPr wrap="square" rtlCol="0" anchor="ctr"/>
+          <a:lstStyle/>
+          <a:p>
+            <a:pPr indent="0" marL="0">
+              <a:buNone/>
+            </a:pPr>
+            <a:r>
+              <a:rPr lang="en-US" sz="900" b="1" spc="200" kern="0" dirty="0">
+                <a:solidFill>
+                  <a:srgbClr val="E0A93C"/>
+                </a:solidFill>
+                <a:latin typeface="Helvetica" pitchFamily="34" charset="0"/>
+                <a:ea typeface="Helvetica" pitchFamily="34" charset="-122"/>
+                <a:cs typeface="Helvetica" pitchFamily="34" charset="-120"/>
+              </a:rPr>
+              <a:t>LO QUE PROBASTE</a:t>
+            </a:r>
+            <a:endParaRPr lang="en-US" sz="900" dirty="0"/>
+          </a:p>
+        </p:txBody>
+      </p:sp>
+      <p:sp>
+        <p:nvSpPr>
+          <p:cNvPr id="16" name="Text 14"/>
+          <p:cNvSpPr/>
+          <p:nvPr/>
+        </p:nvSpPr>
+        <p:spPr>
+          <a:xfrm>
+            <a:off x="6309360" y="1783080"/>
+            <a:ext cx="2286000" cy="548640"/>
+          </a:xfrm>
+          <a:prstGeom prst="rect">
+            <a:avLst/>
+          </a:prstGeom>
+          <a:noFill/>
+          <a:ln/>
+        </p:spPr>
+        <p:txBody>
+          <a:bodyPr wrap="square" rtlCol="0" anchor="ctr"/>
+          <a:lstStyle/>
+          <a:p>
+            <a:pPr indent="0" marL="0">
+              <a:buNone/>
+            </a:pPr>
+            <a:r>
+              <a:rPr lang="en-US" sz="1500" b="1" dirty="0">
+                <a:solidFill>
+                  <a:srgbClr val="E9F5EE"/>
+                </a:solidFill>
+                <a:latin typeface="Helvetica" pitchFamily="34" charset="0"/>
+                <a:ea typeface="Helvetica" pitchFamily="34" charset="-122"/>
+                <a:cs typeface="Helvetica" pitchFamily="34" charset="-120"/>
+              </a:rPr>
+              <a:t>AutoFlow completo</a:t>
+            </a:r>
+            <a:endParaRPr lang="en-US" sz="1500" dirty="0"/>
+          </a:p>
+        </p:txBody>
+      </p:sp>
+      <p:sp>
+        <p:nvSpPr>
+          <p:cNvPr id="17" name="Text 15"/>
+          <p:cNvSpPr/>
+          <p:nvPr/>
+        </p:nvSpPr>
+        <p:spPr>
+          <a:xfrm>
+            <a:off x="6309360" y="2331720"/>
+            <a:ext cx="2286000" cy="365760"/>
+          </a:xfrm>
+          <a:prstGeom prst="rect">
+            <a:avLst/>
+          </a:prstGeom>
+          <a:noFill/>
+          <a:ln/>
+        </p:spPr>
+        <p:txBody>
+          <a:bodyPr wrap="square" rtlCol="0" anchor="ctr"/>
+          <a:lstStyle/>
+          <a:p>
+            <a:pPr indent="0" marL="0">
+              <a:buNone/>
+            </a:pPr>
+            <a:r>
+              <a:rPr lang="en-US" sz="1400" b="1" dirty="0">
+                <a:solidFill>
+                  <a:srgbClr val="35C06F"/>
+                </a:solidFill>
+                <a:latin typeface="Helvetica" pitchFamily="34" charset="0"/>
+                <a:ea typeface="Helvetica" pitchFamily="34" charset="-122"/>
+                <a:cs typeface="Helvetica" pitchFamily="34" charset="-120"/>
+              </a:rPr>
+              <a:t>$3,500 + $497/mes</a:t>
+            </a:r>
+            <a:endParaRPr lang="en-US" sz="1400" dirty="0"/>
+          </a:p>
+        </p:txBody>
+      </p:sp>
+      <p:sp>
+        <p:nvSpPr>
+          <p:cNvPr id="18" name="Text 16"/>
+          <p:cNvSpPr/>
+          <p:nvPr/>
+        </p:nvSpPr>
+        <p:spPr>
+          <a:xfrm>
+            <a:off x="6309360" y="2743200"/>
+            <a:ext cx="2286000" cy="1371600"/>
+          </a:xfrm>
+          <a:prstGeom prst="rect">
+            <a:avLst/>
+          </a:prstGeom>
+          <a:noFill/>
+          <a:ln/>
+        </p:spPr>
+        <p:txBody>
+          <a:bodyPr wrap="square" rtlCol="0" anchor="t"/>
+          <a:lstStyle/>
+          <a:p>
+            <a:pPr indent="0" marL="0">
+              <a:buNone/>
+            </a:pPr>
+            <a:r>
+              <a:rPr lang="en-US" sz="1100" dirty="0">
+                <a:solidFill>
+                  <a:srgbClr val="9DB8AA"/>
+                </a:solidFill>
+                <a:latin typeface="Helvetica" pitchFamily="34" charset="0"/>
+                <a:ea typeface="Helvetica" pitchFamily="34" charset="-122"/>
+                <a:cs typeface="Helvetica" pitchFamily="34" charset="-120"/>
+              </a:rPr>
+              <a:t>Chat + voz + CRM configurado (no en blanco) + agenda + portal. Los 2 sistemas: citas y atención.</a:t>
+            </a:r>
+            <a:endParaRPr lang="en-US" sz="1100" dirty="0"/>
+          </a:p>
+        </p:txBody>
+      </p:sp>
+      <p:sp>
+        <p:nvSpPr>
+          <p:cNvPr id="19" name="Text 17"/>
+          <p:cNvSpPr/>
+          <p:nvPr/>
+        </p:nvSpPr>
+        <p:spPr>
+          <a:xfrm>
+            <a:off x="548640" y="4297680"/>
+            <a:ext cx="8046720" cy="365760"/>
+          </a:xfrm>
+          <a:prstGeom prst="rect">
+            <a:avLst/>
+          </a:prstGeom>
+          <a:noFill/>
+          <a:ln/>
+        </p:spPr>
+        <p:txBody>
+          <a:bodyPr wrap="square" rtlCol="0" anchor="ctr"/>
+          <a:lstStyle/>
+          <a:p>
+            <a:pPr indent="0" marL="0">
+              <a:buNone/>
+            </a:pPr>
+            <a:r>
+              <a:rPr lang="en-US" sz="1100" dirty="0">
+                <a:solidFill>
+                  <a:srgbClr val="9DB8AA"/>
+                </a:solidFill>
+                <a:latin typeface="Helvetica" pitchFamily="34" charset="0"/>
+                <a:ea typeface="Helvetica" pitchFamily="34" charset="-122"/>
+                <a:cs typeface="Helvetica" pitchFamily="34" charset="-120"/>
+              </a:rPr>
+              <a:t>Garantía: funcionando en 21 días o no corre la mensualidad · sin permanencia · financiable (inicial + 2 pagos a 30 días)</a:t>
+            </a:r>
+            <a:endParaRPr lang="en-US" sz="1100" dirty="0"/>
+          </a:p>
+        </p:txBody>
+      </p:sp>
+    </p:spTree>
+  </p:cSld>
+  <p:clrMapOvr>
+    <a:masterClrMapping/>
+  </p:clrMapOvr>
+</p:sld>
+</file>
+
+<file path=ppt/slides/slide11.xml><?xml version="1.0" encoding="utf-8"?>
+<p:sld xmlns:a="http://schemas.openxmlformats.org/drawingml/2006/main" xmlns:r="http://schemas.openxmlformats.org/officeDocument/2006/relationships" xmlns:p="http://schemas.openxmlformats.org/presentationml/2006/main">
+  <p:cSld name="Slide 11">
+    <p:bg>
+      <p:bgPr>
+        <a:solidFill>
+          <a:srgbClr val="07160F"/>
+        </a:solidFill>
+      </p:bgPr>
+    </p:bg>
+    <p:spTree>
+      <p:nvGrpSpPr>
+        <p:cNvPr id="1" name=""/>
+        <p:cNvGrpSpPr/>
+        <p:nvPr/>
+      </p:nvGrpSpPr>
+      <p:grpSpPr>
+        <a:xfrm>
+          <a:off x="0" y="0"/>
+          <a:ext cx="0" cy="0"/>
+          <a:chOff x="0" y="0"/>
+          <a:chExt cx="0" cy="0"/>
+        </a:xfrm>
+      </p:grpSpPr>
+      <p:sp>
+        <p:nvSpPr>
+          <p:cNvPr id="2" name="Text 0"/>
+          <p:cNvSpPr/>
+          <p:nvPr/>
+        </p:nvSpPr>
+        <p:spPr>
+          <a:xfrm>
+            <a:off x="365760" y="4754880"/>
+            <a:ext cx="4572000" cy="274320"/>
+          </a:xfrm>
+          <a:prstGeom prst="rect">
+            <a:avLst/>
+          </a:prstGeom>
+          <a:noFill/>
+          <a:ln/>
+        </p:spPr>
+        <p:txBody>
+          <a:bodyPr wrap="square" rtlCol="0" anchor="ctr"/>
+          <a:lstStyle/>
+          <a:p>
+            <a:pPr indent="0" marL="0">
+              <a:buNone/>
+            </a:pPr>
+            <a:r>
+              <a:rPr lang="en-US" sz="900" dirty="0">
+                <a:solidFill>
+                  <a:srgbClr val="9DB8AA"/>
+                </a:solidFill>
+                <a:latin typeface="Helvetica" pitchFamily="34" charset="0"/>
+                <a:ea typeface="Helvetica" pitchFamily="34" charset="-122"/>
+                <a:cs typeface="Helvetica" pitchFamily="34" charset="-120"/>
+              </a:rPr>
+              <a:t>AI Borinquen · AutoFlow · Puerto Rico</a:t>
+            </a:r>
+            <a:endParaRPr lang="en-US" sz="900" dirty="0"/>
+          </a:p>
+        </p:txBody>
+      </p:sp>
+      <p:sp>
+        <p:nvSpPr>
+          <p:cNvPr id="3" name="Text 1"/>
+          <p:cNvSpPr/>
+          <p:nvPr/>
+        </p:nvSpPr>
+        <p:spPr>
+          <a:xfrm>
+            <a:off x="5120640" y="4754880"/>
+            <a:ext cx="3657600" cy="274320"/>
+          </a:xfrm>
+          <a:prstGeom prst="rect">
+            <a:avLst/>
+          </a:prstGeom>
+          <a:noFill/>
+          <a:ln/>
+        </p:spPr>
+        <p:txBody>
+          <a:bodyPr wrap="square" rtlCol="0" anchor="ctr"/>
+          <a:lstStyle/>
+          <a:p>
+            <a:pPr algn="r" indent="0" marL="0">
+              <a:buNone/>
+            </a:pPr>
+            <a:r>
+              <a:rPr lang="en-US" sz="900" dirty="0">
+                <a:solidFill>
+                  <a:srgbClr val="9DB8AA"/>
+                </a:solidFill>
+                <a:latin typeface="Helvetica" pitchFamily="34" charset="0"/>
+                <a:ea typeface="Helvetica" pitchFamily="34" charset="-122"/>
+                <a:cs typeface="Helvetica" pitchFamily="34" charset="-120"/>
+              </a:rPr>
+              <a:t>Skin Clinic PR</a:t>
+            </a:r>
+            <a:endParaRPr lang="en-US" sz="900" dirty="0"/>
+          </a:p>
+        </p:txBody>
+      </p:sp>
+      <p:sp>
+        <p:nvSpPr>
+          <p:cNvPr id="4" name="Text 2"/>
+          <p:cNvSpPr/>
+          <p:nvPr/>
+        </p:nvSpPr>
+        <p:spPr>
+          <a:xfrm>
+            <a:off x="457200" y="320040"/>
+            <a:ext cx="8229600" cy="274320"/>
+          </a:xfrm>
+          <a:prstGeom prst="rect">
+            <a:avLst/>
+          </a:prstGeom>
+          <a:noFill/>
+          <a:ln/>
+        </p:spPr>
+        <p:txBody>
+          <a:bodyPr wrap="square" rtlCol="0" anchor="ctr"/>
+          <a:lstStyle/>
+          <a:p>
+            <a:pPr indent="0" marL="0">
+              <a:buNone/>
+            </a:pPr>
+            <a:r>
+              <a:rPr lang="en-US" sz="1000" b="1" spc="300" kern="0" dirty="0">
+                <a:solidFill>
+                  <a:srgbClr val="35C06F"/>
+                </a:solidFill>
+                <a:latin typeface="Helvetica" pitchFamily="34" charset="0"/>
+                <a:ea typeface="Helvetica" pitchFamily="34" charset="-122"/>
+                <a:cs typeface="Helvetica" pitchFamily="34" charset="-120"/>
+              </a:rPr>
+              <a:t>LA PRIMERA SEMANA</a:t>
+            </a:r>
+            <a:endParaRPr lang="en-US" sz="1000" dirty="0"/>
+          </a:p>
+        </p:txBody>
+      </p:sp>
+      <p:sp>
+        <p:nvSpPr>
+          <p:cNvPr id="5" name="Text 3"/>
+          <p:cNvSpPr/>
+          <p:nvPr/>
+        </p:nvSpPr>
+        <p:spPr>
+          <a:xfrm>
+            <a:off x="457200" y="594360"/>
+            <a:ext cx="8229600" cy="731520"/>
+          </a:xfrm>
+          <a:prstGeom prst="rect">
+            <a:avLst/>
+          </a:prstGeom>
+          <a:noFill/>
+          <a:ln/>
+        </p:spPr>
+        <p:txBody>
+          <a:bodyPr wrap="square" rtlCol="0" anchor="ctr"/>
+          <a:lstStyle/>
+          <a:p>
+            <a:pPr indent="0" marL="0">
+              <a:buNone/>
+            </a:pPr>
+            <a:r>
+              <a:rPr lang="en-US" sz="2800" b="1" dirty="0">
+                <a:solidFill>
+                  <a:srgbClr val="E9F5EE"/>
+                </a:solidFill>
+                <a:latin typeface="Helvetica" pitchFamily="34" charset="0"/>
+                <a:ea typeface="Helvetica" pitchFamily="34" charset="-122"/>
+                <a:cs typeface="Helvetica" pitchFamily="34" charset="-120"/>
+              </a:rPr>
+              <a:t>Qué pasa desde que dices que sí</a:t>
+            </a:r>
+            <a:endParaRPr lang="en-US" sz="2800" dirty="0"/>
+          </a:p>
+        </p:txBody>
+      </p:sp>
+      <p:sp>
+        <p:nvSpPr>
+          <p:cNvPr id="6" name="Text 4"/>
+          <p:cNvSpPr/>
+          <p:nvPr/>
+        </p:nvSpPr>
+        <p:spPr>
+          <a:xfrm>
+            <a:off x="548640" y="1463040"/>
+            <a:ext cx="8046720" cy="3017520"/>
+          </a:xfrm>
+          <a:prstGeom prst="rect">
+            <a:avLst/>
+          </a:prstGeom>
+          <a:noFill/>
+          <a:ln/>
+        </p:spPr>
+        <p:txBody>
+          <a:bodyPr wrap="square" rtlCol="0" anchor="t"/>
+          <a:lstStyle/>
+          <a:p>
+            <a:pPr marL="342900" indent="-342900">
+              <a:spcAft>
+                <a:spcPts val="800"/>
+              </a:spcAft>
+              <a:buSzPct val="100000"/>
+              <a:buChar char="●"/>
+            </a:pPr>
+            <a:r>
+              <a:rPr lang="en-US" sz="1600" dirty="0">
+                <a:solidFill>
+                  <a:srgbClr val="E9F5EE"/>
+                </a:solidFill>
+                <a:latin typeface="Helvetica" pitchFamily="34" charset="0"/>
+                <a:ea typeface="Helvetica" pitchFamily="34" charset="-122"/>
+                <a:cs typeface="Helvetica" pitchFamily="34" charset="-120"/>
+              </a:rPr>
+              <a:t>Instalacion del sistema con el numero de WhatsApp actual de la clinica</a:t>
+            </a:r>
+            <a:endParaRPr lang="en-US" sz="1600" dirty="0"/>
+          </a:p>
+          <a:p>
+            <a:pPr marL="342900" indent="-342900">
+              <a:spcAft>
+                <a:spcPts val="800"/>
+              </a:spcAft>
+              <a:buSzPct val="100000"/>
+              <a:buChar char="●"/>
+            </a:pPr>
+            <a:r>
+              <a:rPr lang="en-US" sz="1600" dirty="0">
+                <a:solidFill>
+                  <a:srgbClr val="E9F5EE"/>
+                </a:solidFill>
+                <a:latin typeface="Helvetica" pitchFamily="34" charset="0"/>
+                <a:ea typeface="Helvetica" pitchFamily="34" charset="-122"/>
+                <a:cs typeface="Helvetica" pitchFamily="34" charset="-120"/>
+              </a:rPr>
+              <a:t>Entrenamiento del asistente con los servicios reales: faciales, botox, rellenos, laser, dermatologia</a:t>
+            </a:r>
+            <a:endParaRPr lang="en-US" sz="1600" dirty="0"/>
+          </a:p>
+          <a:p>
+            <a:pPr marL="342900" indent="-342900">
+              <a:spcAft>
+                <a:spcPts val="800"/>
+              </a:spcAft>
+              <a:buSzPct val="100000"/>
+              <a:buChar char="●"/>
+            </a:pPr>
+            <a:r>
+              <a:rPr lang="en-US" sz="1600" dirty="0">
+                <a:solidFill>
+                  <a:srgbClr val="E9F5EE"/>
+                </a:solidFill>
+                <a:latin typeface="Helvetica" pitchFamily="34" charset="0"/>
+                <a:ea typeface="Helvetica" pitchFamily="34" charset="-122"/>
+                <a:cs typeface="Helvetica" pitchFamily="34" charset="-120"/>
+              </a:rPr>
+              <a:t>Prueba en vivo respondiendo mensajes y llamadas de ejemplo</a:t>
+            </a:r>
+            <a:endParaRPr lang="en-US" sz="1600" dirty="0"/>
+          </a:p>
+          <a:p>
+            <a:pPr marL="342900" indent="-342900">
+              <a:spcAft>
+                <a:spcPts val="800"/>
+              </a:spcAft>
+              <a:buSzPct val="100000"/>
+              <a:buChar char="●"/>
+            </a:pPr>
+            <a:r>
+              <a:rPr lang="en-US" sz="1600" dirty="0">
+                <a:solidFill>
+                  <a:srgbClr val="E9F5EE"/>
+                </a:solidFill>
+                <a:latin typeface="Helvetica" pitchFamily="34" charset="0"/>
+                <a:ea typeface="Helvetica" pitchFamily="34" charset="-122"/>
+                <a:cs typeface="Helvetica" pitchFamily="34" charset="-120"/>
+              </a:rPr>
+              <a:t>Ajustes finales segun el flujo de trabajo de la recepcion</a:t>
+            </a:r>
+            <a:endParaRPr lang="en-US" sz="1600" dirty="0"/>
+          </a:p>
+        </p:txBody>
+      </p:sp>
+    </p:spTree>
+  </p:cSld>
+  <p:clrMapOvr>
+    <a:masterClrMapping/>
+  </p:clrMapOvr>
+</p:sld>
+</file>
+
+<file path=ppt/slides/slide12.xml><?xml version="1.0" encoding="utf-8"?>
+<p:sld xmlns:a="http://schemas.openxmlformats.org/drawingml/2006/main" xmlns:r="http://schemas.openxmlformats.org/officeDocument/2006/relationships" xmlns:p="http://schemas.openxmlformats.org/presentationml/2006/main">
+  <p:cSld name="Slide 12">
+    <p:bg>
+      <p:bgPr>
+        <a:solidFill>
+          <a:srgbClr val="07160F"/>
+        </a:solidFill>
+      </p:bgPr>
+    </p:bg>
+    <p:spTree>
+      <p:nvGrpSpPr>
+        <p:cNvPr id="1" name=""/>
+        <p:cNvGrpSpPr/>
+        <p:nvPr/>
+      </p:nvGrpSpPr>
+      <p:grpSpPr>
+        <a:xfrm>
+          <a:off x="0" y="0"/>
+          <a:ext cx="0" cy="0"/>
+          <a:chOff x="0" y="0"/>
+          <a:chExt cx="0" cy="0"/>
+        </a:xfrm>
+      </p:grpSpPr>
+      <p:sp>
+        <p:nvSpPr>
+          <p:cNvPr id="2" name="Text 0"/>
+          <p:cNvSpPr/>
+          <p:nvPr/>
+        </p:nvSpPr>
+        <p:spPr>
+          <a:xfrm>
+            <a:off x="365760" y="4754880"/>
+            <a:ext cx="4572000" cy="274320"/>
+          </a:xfrm>
+          <a:prstGeom prst="rect">
+            <a:avLst/>
+          </a:prstGeom>
+          <a:noFill/>
+          <a:ln/>
+        </p:spPr>
+        <p:txBody>
+          <a:bodyPr wrap="square" rtlCol="0" anchor="ctr"/>
+          <a:lstStyle/>
+          <a:p>
+            <a:pPr indent="0" marL="0">
+              <a:buNone/>
+            </a:pPr>
+            <a:r>
+              <a:rPr lang="en-US" sz="900" dirty="0">
+                <a:solidFill>
+                  <a:srgbClr val="9DB8AA"/>
+                </a:solidFill>
+                <a:latin typeface="Helvetica" pitchFamily="34" charset="0"/>
+                <a:ea typeface="Helvetica" pitchFamily="34" charset="-122"/>
+                <a:cs typeface="Helvetica" pitchFamily="34" charset="-120"/>
+              </a:rPr>
+              <a:t>AI Borinquen · AutoFlow · Puerto Rico</a:t>
+            </a:r>
+            <a:endParaRPr lang="en-US" sz="900" dirty="0"/>
+          </a:p>
+        </p:txBody>
+      </p:sp>
+      <p:sp>
+        <p:nvSpPr>
+          <p:cNvPr id="3" name="Text 1"/>
+          <p:cNvSpPr/>
+          <p:nvPr/>
+        </p:nvSpPr>
+        <p:spPr>
+          <a:xfrm>
+            <a:off x="5120640" y="4754880"/>
+            <a:ext cx="3657600" cy="274320"/>
+          </a:xfrm>
+          <a:prstGeom prst="rect">
+            <a:avLst/>
+          </a:prstGeom>
+          <a:noFill/>
+          <a:ln/>
+        </p:spPr>
+        <p:txBody>
+          <a:bodyPr wrap="square" rtlCol="0" anchor="ctr"/>
+          <a:lstStyle/>
+          <a:p>
+            <a:pPr algn="r" indent="0" marL="0">
+              <a:buNone/>
+            </a:pPr>
+            <a:r>
+              <a:rPr lang="en-US" sz="900" dirty="0">
+                <a:solidFill>
+                  <a:srgbClr val="9DB8AA"/>
+                </a:solidFill>
+                <a:latin typeface="Helvetica" pitchFamily="34" charset="0"/>
+                <a:ea typeface="Helvetica" pitchFamily="34" charset="-122"/>
+                <a:cs typeface="Helvetica" pitchFamily="34" charset="-120"/>
+              </a:rPr>
+              <a:t>Skin Clinic PR</a:t>
+            </a:r>
+            <a:endParaRPr lang="en-US" sz="900" dirty="0"/>
+          </a:p>
+        </p:txBody>
+      </p:sp>
+      <p:sp>
+        <p:nvSpPr>
+          <p:cNvPr id="4" name="Shape 2"/>
+          <p:cNvSpPr/>
+          <p:nvPr/>
+        </p:nvSpPr>
+        <p:spPr>
+          <a:xfrm>
+            <a:off x="0" y="0"/>
+            <a:ext cx="228600" cy="5143500"/>
+          </a:xfrm>
+          <a:prstGeom prst="rect">
+            <a:avLst/>
+          </a:prstGeom>
+          <a:solidFill>
+            <a:srgbClr val="B76E79"/>
+          </a:solidFill>
+          <a:ln/>
+        </p:spPr>
+      </p:sp>
+      <p:sp>
+        <p:nvSpPr>
+          <p:cNvPr id="5" name="Text 3"/>
+          <p:cNvSpPr/>
+          <p:nvPr/>
+        </p:nvSpPr>
+        <p:spPr>
+          <a:xfrm>
+            <a:off x="548640" y="1280160"/>
+            <a:ext cx="8229600" cy="274320"/>
+          </a:xfrm>
+          <a:prstGeom prst="rect">
+            <a:avLst/>
+          </a:prstGeom>
+          <a:noFill/>
+          <a:ln/>
+        </p:spPr>
+        <p:txBody>
+          <a:bodyPr wrap="square" rtlCol="0" anchor="ctr"/>
+          <a:lstStyle/>
+          <a:p>
+            <a:pPr indent="0" marL="0">
+              <a:buNone/>
+            </a:pPr>
+            <a:r>
+              <a:rPr lang="en-US" sz="1000" b="1" spc="300" kern="0" dirty="0">
+                <a:solidFill>
+                  <a:srgbClr val="35C06F"/>
+                </a:solidFill>
+                <a:latin typeface="Helvetica" pitchFamily="34" charset="0"/>
+                <a:ea typeface="Helvetica" pitchFamily="34" charset="-122"/>
+                <a:cs typeface="Helvetica" pitchFamily="34" charset="-120"/>
+              </a:rPr>
+              <a:t>PRÓXIMO PASO</a:t>
+            </a:r>
+            <a:endParaRPr lang="en-US" sz="1000" dirty="0"/>
+          </a:p>
+        </p:txBody>
+      </p:sp>
+      <p:sp>
+        <p:nvSpPr>
+          <p:cNvPr id="6" name="Text 4"/>
+          <p:cNvSpPr/>
+          <p:nvPr/>
+        </p:nvSpPr>
+        <p:spPr>
+          <a:xfrm>
+            <a:off x="548640" y="1645920"/>
+            <a:ext cx="7863840" cy="1280160"/>
+          </a:xfrm>
+          <a:prstGeom prst="rect">
+            <a:avLst/>
+          </a:prstGeom>
+          <a:noFill/>
+          <a:ln/>
+        </p:spPr>
+        <p:txBody>
+          <a:bodyPr wrap="square" rtlCol="0" anchor="ctr"/>
+          <a:lstStyle/>
+          <a:p>
+            <a:pPr indent="0" marL="0">
+              <a:buNone/>
+            </a:pPr>
+            <a:r>
+              <a:rPr lang="en-US" sz="2400" b="1" dirty="0">
+                <a:solidFill>
+                  <a:srgbClr val="E9F5EE"/>
+                </a:solidFill>
+                <a:latin typeface="Helvetica" pitchFamily="34" charset="0"/>
+                <a:ea typeface="Helvetica" pitchFamily="34" charset="-122"/>
+                <a:cs typeface="Helvetica" pitchFamily="34" charset="-120"/>
+              </a:rPr>
+              <a:t>Agendar la instalacion del sistema con el numero de WhatsApp de Skin Clinic PR.</a:t>
+            </a:r>
+            <a:endParaRPr lang="en-US" sz="2400" dirty="0"/>
+          </a:p>
+        </p:txBody>
+      </p:sp>
+      <p:sp>
+        <p:nvSpPr>
+          <p:cNvPr id="7" name="Text 5"/>
+          <p:cNvSpPr/>
+          <p:nvPr/>
+        </p:nvSpPr>
+        <p:spPr>
+          <a:xfrm>
+            <a:off x="548640" y="3200400"/>
+            <a:ext cx="7863840" cy="457200"/>
+          </a:xfrm>
+          <a:prstGeom prst="rect">
+            <a:avLst/>
+          </a:prstGeom>
+          <a:noFill/>
+          <a:ln/>
+        </p:spPr>
+        <p:txBody>
+          <a:bodyPr wrap="square" rtlCol="0" anchor="ctr"/>
+          <a:lstStyle/>
+          <a:p>
+            <a:pPr indent="0" marL="0">
+              <a:buNone/>
+            </a:pPr>
+            <a:r>
+              <a:rPr lang="en-US" sz="1300" dirty="0">
+                <a:solidFill>
+                  <a:srgbClr val="9DB8AA"/>
+                </a:solidFill>
+                <a:latin typeface="Helvetica" pitchFamily="34" charset="0"/>
+                <a:ea typeface="Helvetica" pitchFamily="34" charset="-122"/>
+                <a:cs typeface="Helvetica" pitchFamily="34" charset="-120"/>
+              </a:rPr>
+              <a:t>WhatsApp AI Borinquen · +1 (939) 304-0491 · https://content-os-chi-seven.vercel.app/portal/skin-clinic-pr?k=850528a55e0b4c9dd9f068942354d57b</a:t>
+            </a:r>
+            <a:endParaRPr lang="en-US" sz="1300" dirty="0"/>
           </a:p>
         </p:txBody>
       </p:sp>
@@ -1882,7 +3388,7 @@
         <p:spPr>
           <a:xfrm>
             <a:off x="365760" y="4754880"/>
-            <a:ext cx="3657600" cy="274320"/>
+            <a:ext cx="4572000" cy="274320"/>
           </a:xfrm>
           <a:prstGeom prst="rect">
             <a:avLst/>
@@ -1906,7 +3412,7 @@
                 <a:ea typeface="Helvetica" pitchFamily="34" charset="-122"/>
                 <a:cs typeface="Helvetica" pitchFamily="34" charset="-120"/>
               </a:rPr>
-              <a:t>AI Borinquen · AutoFlow</a:t>
+              <a:t>AI Borinquen · AutoFlow · Puerto Rico</a:t>
             </a:r>
             <a:endParaRPr lang="en-US" sz="900" dirty="0"/>
           </a:p>
@@ -1984,7 +3490,7 @@
                 <a:ea typeface="Helvetica" pitchFamily="34" charset="-122"/>
                 <a:cs typeface="Helvetica" pitchFamily="34" charset="-120"/>
               </a:rPr>
-              <a:t>LO QUE VIMOS</a:t>
+              <a:t>QUIÉNES SOMOS</a:t>
             </a:r>
             <a:endParaRPr lang="en-US" sz="1000" dirty="0"/>
           </a:p>
@@ -2023,7 +3529,7 @@
                 <a:ea typeface="Helvetica" pitchFamily="34" charset="-122"/>
                 <a:cs typeface="Helvetica" pitchFamily="34" charset="-120"/>
               </a:rPr>
-              <a:t>Lo que está pasando hoy en Skin Clinic PR</a:t>
+              <a:t>AI Borinquen: de Puerto Rico, para negocios de Puerto Rico</a:t>
             </a:r>
             <a:endParaRPr lang="en-US" sz="2800" dirty="0"/>
           </a:p>
@@ -2066,7 +3572,7 @@
                 <a:ea typeface="Helvetica" pitchFamily="34" charset="-122"/>
                 <a:cs typeface="Helvetica" pitchFamily="34" charset="-120"/>
               </a:rPr>
-              <a:t>Mensajes de Instagram y WhatsApp llegan de noche y quedan sin responder hasta el otro dia</a:t>
+              <a:t>Agencia de automatización con IA, 100 % de Puerto Rico. Hablas con personas de aquí.</a:t>
             </a:r>
             <a:endParaRPr lang="en-US" sz="1600" dirty="0"/>
           </a:p>
@@ -2087,7 +3593,7 @@
                 <a:ea typeface="Helvetica" pitchFamily="34" charset="-122"/>
                 <a:cs typeface="Helvetica" pitchFamily="34" charset="-120"/>
               </a:rPr>
-              <a:t>Citas que se caen porque nadie las confirma a tiempo</a:t>
+              <a:t>Parte de IA Market, la casa de Level Up Media (Meta Ads) y AI Borinquen (agentes de IA).</a:t>
             </a:r>
             <a:endParaRPr lang="en-US" sz="1600" dirty="0"/>
           </a:p>
@@ -2108,7 +3614,7 @@
                 <a:ea typeface="Helvetica" pitchFamily="34" charset="-122"/>
                 <a:cs typeface="Helvetica" pitchFamily="34" charset="-120"/>
               </a:rPr>
-              <a:t>Recepcion no da abasto con las consultas repetidas de precios de tratamientos</a:t>
+              <a:t>Desarrolladores propios: los agentes se entrenan con tu negocio, no se copian y pegan.</a:t>
             </a:r>
             <a:endParaRPr lang="en-US" sz="1600" dirty="0"/>
           </a:p>
@@ -2129,7 +3635,7 @@
                 <a:ea typeface="Helvetica" pitchFamily="34" charset="-122"/>
                 <a:cs typeface="Helvetica" pitchFamily="34" charset="-120"/>
               </a:rPr>
-              <a:t>Comunidad activa de 40K seguidores en Instagram (@skinclinicpr) generando consultas constantes</a:t>
+              <a:t>No vendemos un chatbot: instalamos un empleado digital con un trabajo concreto.</a:t>
             </a:r>
             <a:endParaRPr lang="en-US" sz="1600" dirty="0"/>
           </a:p>
@@ -2176,7 +3682,7 @@
         <p:spPr>
           <a:xfrm>
             <a:off x="365760" y="4754880"/>
-            <a:ext cx="3657600" cy="274320"/>
+            <a:ext cx="4572000" cy="274320"/>
           </a:xfrm>
           <a:prstGeom prst="rect">
             <a:avLst/>
@@ -2200,7 +3706,7 @@
                 <a:ea typeface="Helvetica" pitchFamily="34" charset="-122"/>
                 <a:cs typeface="Helvetica" pitchFamily="34" charset="-120"/>
               </a:rPr>
-              <a:t>AI Borinquen · AutoFlow</a:t>
+              <a:t>AI Borinquen · AutoFlow · Puerto Rico</a:t>
             </a:r>
             <a:endParaRPr lang="en-US" sz="900" dirty="0"/>
           </a:p>
@@ -2278,7 +3784,7 @@
                 <a:ea typeface="Helvetica" pitchFamily="34" charset="-122"/>
                 <a:cs typeface="Helvetica" pitchFamily="34" charset="-120"/>
               </a:rPr>
-              <a:t>LO QUE CUESTA</a:t>
+              <a:t>NUESTRA VISIÓN</a:t>
             </a:r>
             <a:endParaRPr lang="en-US" sz="1000" dirty="0"/>
           </a:p>
@@ -2317,7 +3823,7 @@
                 <a:ea typeface="Helvetica" pitchFamily="34" charset="-122"/>
                 <a:cs typeface="Helvetica" pitchFamily="34" charset="-120"/>
               </a:rPr>
-              <a:t>Cada hora sin responder tiene un precio</a:t>
+              <a:t>Digitalizar y capacitar los negocios de la isla</a:t>
             </a:r>
             <a:endParaRPr lang="en-US" sz="2800" dirty="0"/>
           </a:p>
@@ -2332,7 +3838,7 @@
         <p:spPr>
           <a:xfrm>
             <a:off x="548640" y="1463040"/>
-            <a:ext cx="8046720" cy="2011680"/>
+            <a:ext cx="8046720" cy="3017520"/>
           </a:xfrm>
           <a:prstGeom prst="rect">
             <a:avLst/>
@@ -2360,7 +3866,7 @@
                 <a:ea typeface="Helvetica" pitchFamily="34" charset="-122"/>
                 <a:cs typeface="Helvetica" pitchFamily="34" charset="-120"/>
               </a:rPr>
-              <a:t>El 78% de los clientes elige al negocio que responde primero, y hoy esas respuestas llegan tarde</a:t>
+              <a:t>Que ningún negocio de la isla pierda un cliente por no contestar a tiempo.</a:t>
             </a:r>
             <a:endParaRPr lang="en-US" sz="1600" dirty="0"/>
           </a:p>
@@ -2381,7 +3887,7 @@
                 <a:ea typeface="Helvetica" pitchFamily="34" charset="-122"/>
                 <a:cs typeface="Helvetica" pitchFamily="34" charset="-120"/>
               </a:rPr>
-              <a:t>El 67% de los mensajes fuera de horario se pierden sin seguimiento</a:t>
+              <a:t>Digitalizar Y capacitar: lo instalamos por ti, o te enseñamos a hacerlo tú.</a:t>
             </a:r>
             <a:endParaRPr lang="en-US" sz="1600" dirty="0"/>
           </a:p>
@@ -2402,73 +3908,30 @@
                 <a:ea typeface="Helvetica" pitchFamily="34" charset="-122"/>
                 <a:cs typeface="Helvetica" pitchFamily="34" charset="-120"/>
               </a:rPr>
-              <a:t>Cada cita que se cae por falta de confirmacion es tiempo y espacio en agenda que no se recupera</a:t>
+              <a:t>Agentes por rol (recepción, ventas, citas), en tu voz y en tu idioma.</a:t>
             </a:r>
             <a:endParaRPr lang="en-US" sz="1600" dirty="0"/>
           </a:p>
-        </p:txBody>
-      </p:sp>
-      <p:sp>
-        <p:nvSpPr>
-          <p:cNvPr id="7" name="Shape 5"/>
-          <p:cNvSpPr/>
-          <p:nvPr/>
-        </p:nvSpPr>
-        <p:spPr>
-          <a:xfrm>
-            <a:off x="548640" y="3566160"/>
-            <a:ext cx="8046720" cy="914400"/>
-          </a:xfrm>
-          <a:prstGeom prst="rect">
-            <a:avLst/>
-          </a:prstGeom>
-          <a:solidFill>
-            <a:srgbClr val="0D2118"/>
-          </a:solidFill>
-          <a:ln w="12700">
-            <a:solidFill>
-              <a:srgbClr val="1F3A2B"/>
-            </a:solidFill>
-            <a:prstDash val="solid"/>
-          </a:ln>
-        </p:spPr>
-      </p:sp>
-      <p:sp>
-        <p:nvSpPr>
-          <p:cNvPr id="8" name="Text 6"/>
-          <p:cNvSpPr/>
-          <p:nvPr/>
-        </p:nvSpPr>
-        <p:spPr>
-          <a:xfrm>
-            <a:off x="731520" y="3611880"/>
-            <a:ext cx="7680960" cy="822960"/>
-          </a:xfrm>
-          <a:prstGeom prst="rect">
-            <a:avLst/>
-          </a:prstGeom>
-          <a:noFill/>
-          <a:ln/>
-        </p:spPr>
-        <p:txBody>
-          <a:bodyPr wrap="square" rtlCol="0" anchor="ctr"/>
-          <a:lstStyle/>
-          <a:p>
-            <a:pPr indent="0" marL="0">
-              <a:buNone/>
-            </a:pPr>
-            <a:r>
-              <a:rPr lang="en-US" sz="1300" dirty="0">
-                <a:solidFill>
-                  <a:srgbClr val="E0A93C"/>
-                </a:solidFill>
-                <a:latin typeface="Helvetica" pitchFamily="34" charset="0"/>
-                <a:ea typeface="Helvetica" pitchFamily="34" charset="-122"/>
-                <a:cs typeface="Helvetica" pitchFamily="34" charset="-120"/>
-              </a:rPr>
-              <a:t>78% de los clientes cierran con el primero que responde · 67% se van tras una mala experiencia</a:t>
-            </a:r>
-            <a:endParaRPr lang="en-US" sz="1300" dirty="0"/>
+          <a:p>
+            <a:pPr marL="342900" indent="-342900">
+              <a:spcAft>
+                <a:spcPts val="800"/>
+              </a:spcAft>
+              <a:buSzPct val="100000"/>
+              <a:buChar char="●"/>
+            </a:pPr>
+            <a:r>
+              <a:rPr lang="en-US" sz="1600" dirty="0">
+                <a:solidFill>
+                  <a:srgbClr val="E9F5EE"/>
+                </a:solidFill>
+                <a:latin typeface="Helvetica" pitchFamily="34" charset="0"/>
+                <a:ea typeface="Helvetica" pitchFamily="34" charset="-122"/>
+                <a:cs typeface="Helvetica" pitchFamily="34" charset="-120"/>
+              </a:rPr>
+              <a:t>Todo medible: tú ves las llamadas, los mensajes y los leads en tu portal.</a:t>
+            </a:r>
+            <a:endParaRPr lang="en-US" sz="1600" dirty="0"/>
           </a:p>
         </p:txBody>
       </p:sp>
@@ -2513,7 +3976,7 @@
         <p:spPr>
           <a:xfrm>
             <a:off x="365760" y="4754880"/>
-            <a:ext cx="3657600" cy="274320"/>
+            <a:ext cx="4572000" cy="274320"/>
           </a:xfrm>
           <a:prstGeom prst="rect">
             <a:avLst/>
@@ -2537,7 +4000,7 @@
                 <a:ea typeface="Helvetica" pitchFamily="34" charset="-122"/>
                 <a:cs typeface="Helvetica" pitchFamily="34" charset="-120"/>
               </a:rPr>
-              <a:t>AI Borinquen · AutoFlow</a:t>
+              <a:t>AI Borinquen · AutoFlow · Puerto Rico</a:t>
             </a:r>
             <a:endParaRPr lang="en-US" sz="900" dirty="0"/>
           </a:p>
@@ -2615,7 +4078,7 @@
                 <a:ea typeface="Helvetica" pitchFamily="34" charset="-122"/>
                 <a:cs typeface="Helvetica" pitchFamily="34" charset="-120"/>
               </a:rPr>
-              <a:t>EL SISTEMA</a:t>
+              <a:t>A QUIÉN HEMOS AYUDADO</a:t>
             </a:r>
             <a:endParaRPr lang="en-US" sz="1000" dirty="0"/>
           </a:p>
@@ -2654,7 +4117,7 @@
                 <a:ea typeface="Helvetica" pitchFamily="34" charset="-122"/>
                 <a:cs typeface="Helvetica" pitchFamily="34" charset="-120"/>
               </a:rPr>
-              <a:t>Así queda Skin Clinic PR con AutoFlow</a:t>
+              <a:t>Clientes de aquí, con resultados que puedes verificar</a:t>
             </a:r>
             <a:endParaRPr lang="en-US" sz="2800" dirty="0"/>
           </a:p>
@@ -2662,14 +4125,80 @@
       </p:sp>
       <p:sp>
         <p:nvSpPr>
-          <p:cNvPr id="6" name="Text 4"/>
-          <p:cNvSpPr/>
-          <p:nvPr/>
-        </p:nvSpPr>
-        <p:spPr>
-          <a:xfrm>
-            <a:off x="548640" y="1463040"/>
-            <a:ext cx="8046720" cy="3017520"/>
+          <p:cNvPr id="6" name="Shape 4"/>
+          <p:cNvSpPr/>
+          <p:nvPr/>
+        </p:nvSpPr>
+        <p:spPr>
+          <a:xfrm>
+            <a:off x="457200" y="1463040"/>
+            <a:ext cx="2651760" cy="2926080"/>
+          </a:xfrm>
+          <a:prstGeom prst="roundRect">
+            <a:avLst>
+              <a:gd name="adj" fmla="val 3448"/>
+            </a:avLst>
+          </a:prstGeom>
+          <a:solidFill>
+            <a:srgbClr val="0D2118"/>
+          </a:solidFill>
+          <a:ln w="12700">
+            <a:solidFill>
+              <a:srgbClr val="1F3A2B"/>
+            </a:solidFill>
+            <a:prstDash val="solid"/>
+          </a:ln>
+        </p:spPr>
+      </p:sp>
+      <p:sp>
+        <p:nvSpPr>
+          <p:cNvPr id="7" name="Text 5"/>
+          <p:cNvSpPr/>
+          <p:nvPr/>
+        </p:nvSpPr>
+        <p:spPr>
+          <a:xfrm>
+            <a:off x="640080" y="1554480"/>
+            <a:ext cx="2286000" cy="640080"/>
+          </a:xfrm>
+          <a:prstGeom prst="rect">
+            <a:avLst/>
+          </a:prstGeom>
+          <a:noFill/>
+          <a:ln/>
+        </p:spPr>
+        <p:txBody>
+          <a:bodyPr wrap="square" rtlCol="0" anchor="ctr"/>
+          <a:lstStyle/>
+          <a:p>
+            <a:pPr indent="0" marL="0">
+              <a:buNone/>
+            </a:pPr>
+            <a:r>
+              <a:rPr lang="en-US" sz="1300" b="1" dirty="0">
+                <a:solidFill>
+                  <a:srgbClr val="E9F5EE"/>
+                </a:solidFill>
+                <a:latin typeface="Helvetica" pitchFamily="34" charset="0"/>
+                <a:ea typeface="Helvetica" pitchFamily="34" charset="-122"/>
+                <a:cs typeface="Helvetica" pitchFamily="34" charset="-120"/>
+              </a:rPr>
+              <a:t>Teo · Mano Santa PR (terapista)</a:t>
+            </a:r>
+            <a:endParaRPr lang="en-US" sz="1300" dirty="0"/>
+          </a:p>
+        </p:txBody>
+      </p:sp>
+      <p:sp>
+        <p:nvSpPr>
+          <p:cNvPr id="8" name="Text 6"/>
+          <p:cNvSpPr/>
+          <p:nvPr/>
+        </p:nvSpPr>
+        <p:spPr>
+          <a:xfrm>
+            <a:off x="640080" y="2194560"/>
+            <a:ext cx="2286000" cy="1005840"/>
           </a:xfrm>
           <a:prstGeom prst="rect">
             <a:avLst/>
@@ -2681,15 +4210,116 @@
           <a:bodyPr wrap="square" rtlCol="0" anchor="t"/>
           <a:lstStyle/>
           <a:p>
-            <a:pPr marL="342900" indent="-342900">
-              <a:spcAft>
-                <a:spcPts val="800"/>
-              </a:spcAft>
-              <a:buSzPct val="100000"/>
-              <a:buChar char="●"/>
-            </a:pPr>
-            <a:r>
-              <a:rPr lang="en-US" sz="1600" dirty="0">
+            <a:pPr indent="0" marL="0">
+              <a:buNone/>
+            </a:pPr>
+            <a:r>
+              <a:rPr lang="en-US" sz="1150" dirty="0">
+                <a:solidFill>
+                  <a:srgbClr val="35C06F"/>
+                </a:solidFill>
+                <a:latin typeface="Helvetica" pitchFamily="34" charset="0"/>
+                <a:ea typeface="Helvetica" pitchFamily="34" charset="-122"/>
+                <a:cs typeface="Helvetica" pitchFamily="34" charset="-120"/>
+              </a:rPr>
+              <a:t>Respondía solo el 20 % de sus leads. Hoy responde en segundos, precalifica y agenda.</a:t>
+            </a:r>
+            <a:endParaRPr lang="en-US" sz="1150" dirty="0"/>
+          </a:p>
+        </p:txBody>
+      </p:sp>
+      <p:sp>
+        <p:nvSpPr>
+          <p:cNvPr id="9" name="Text 7"/>
+          <p:cNvSpPr/>
+          <p:nvPr/>
+        </p:nvSpPr>
+        <p:spPr>
+          <a:xfrm>
+            <a:off x="640080" y="3200400"/>
+            <a:ext cx="2286000" cy="1097280"/>
+          </a:xfrm>
+          <a:prstGeom prst="rect">
+            <a:avLst/>
+          </a:prstGeom>
+          <a:noFill/>
+          <a:ln/>
+        </p:spPr>
+        <p:txBody>
+          <a:bodyPr wrap="square" rtlCol="0" anchor="t"/>
+          <a:lstStyle/>
+          <a:p>
+            <a:pPr indent="0" marL="0">
+              <a:buNone/>
+            </a:pPr>
+            <a:r>
+              <a:rPr lang="en-US" sz="1050" i="1" dirty="0">
+                <a:solidFill>
+                  <a:srgbClr val="9DB8AA"/>
+                </a:solidFill>
+                <a:latin typeface="Helvetica" pitchFamily="34" charset="0"/>
+                <a:ea typeface="Helvetica" pitchFamily="34" charset="-122"/>
+                <a:cs typeface="Helvetica" pitchFamily="34" charset="-120"/>
+              </a:rPr>
+              <a:t>“Me da tranquilidad saber que las conversaciones se siguen atendiendo.”</a:t>
+            </a:r>
+            <a:endParaRPr lang="en-US" sz="1050" dirty="0"/>
+          </a:p>
+        </p:txBody>
+      </p:sp>
+      <p:sp>
+        <p:nvSpPr>
+          <p:cNvPr id="10" name="Shape 8"/>
+          <p:cNvSpPr/>
+          <p:nvPr/>
+        </p:nvSpPr>
+        <p:spPr>
+          <a:xfrm>
+            <a:off x="3291840" y="1463040"/>
+            <a:ext cx="2651760" cy="2926080"/>
+          </a:xfrm>
+          <a:prstGeom prst="roundRect">
+            <a:avLst>
+              <a:gd name="adj" fmla="val 3448"/>
+            </a:avLst>
+          </a:prstGeom>
+          <a:solidFill>
+            <a:srgbClr val="0D2118"/>
+          </a:solidFill>
+          <a:ln w="12700">
+            <a:solidFill>
+              <a:srgbClr val="1F3A2B"/>
+            </a:solidFill>
+            <a:prstDash val="solid"/>
+          </a:ln>
+        </p:spPr>
+      </p:sp>
+      <p:sp>
+        <p:nvSpPr>
+          <p:cNvPr id="11" name="Text 9"/>
+          <p:cNvSpPr/>
+          <p:nvPr/>
+        </p:nvSpPr>
+        <p:spPr>
+          <a:xfrm>
+            <a:off x="3474720" y="1554480"/>
+            <a:ext cx="2286000" cy="640080"/>
+          </a:xfrm>
+          <a:prstGeom prst="rect">
+            <a:avLst/>
+          </a:prstGeom>
+          <a:noFill/>
+          <a:ln/>
+        </p:spPr>
+        <p:txBody>
+          <a:bodyPr wrap="square" rtlCol="0" anchor="ctr"/>
+          <a:lstStyle/>
+          <a:p>
+            <a:pPr indent="0" marL="0">
+              <a:buNone/>
+            </a:pPr>
+            <a:r>
+              <a:rPr lang="en-US" sz="1300" b="1" dirty="0">
                 <a:solidFill>
                   <a:srgbClr val="E9F5EE"/>
                 </a:solidFill>
@@ -2697,20 +4327,143 @@
                 <a:ea typeface="Helvetica" pitchFamily="34" charset="-122"/>
                 <a:cs typeface="Helvetica" pitchFamily="34" charset="-120"/>
               </a:rPr>
-              <a:t>Agente de chat en Instagram y WhatsApp respondiendo preguntas de servicios y precios las 24 horas</a:t>
-            </a:r>
-            <a:endParaRPr lang="en-US" sz="1600" dirty="0"/>
-          </a:p>
-          <a:p>
-            <a:pPr marL="342900" indent="-342900">
-              <a:spcAft>
-                <a:spcPts val="800"/>
-              </a:spcAft>
-              <a:buSzPct val="100000"/>
-              <a:buChar char="●"/>
-            </a:pPr>
-            <a:r>
-              <a:rPr lang="en-US" sz="1600" dirty="0">
+              <a:t>Milton · Caribe Paint</a:t>
+            </a:r>
+            <a:endParaRPr lang="en-US" sz="1300" dirty="0"/>
+          </a:p>
+        </p:txBody>
+      </p:sp>
+      <p:sp>
+        <p:nvSpPr>
+          <p:cNvPr id="12" name="Text 10"/>
+          <p:cNvSpPr/>
+          <p:nvPr/>
+        </p:nvSpPr>
+        <p:spPr>
+          <a:xfrm>
+            <a:off x="3474720" y="2194560"/>
+            <a:ext cx="2286000" cy="1005840"/>
+          </a:xfrm>
+          <a:prstGeom prst="rect">
+            <a:avLst/>
+          </a:prstGeom>
+          <a:noFill/>
+          <a:ln/>
+        </p:spPr>
+        <p:txBody>
+          <a:bodyPr wrap="square" rtlCol="0" anchor="t"/>
+          <a:lstStyle/>
+          <a:p>
+            <a:pPr indent="0" marL="0">
+              <a:buNone/>
+            </a:pPr>
+            <a:r>
+              <a:rPr lang="en-US" sz="1150" dirty="0">
+                <a:solidFill>
+                  <a:srgbClr val="35C06F"/>
+                </a:solidFill>
+                <a:latin typeface="Helvetica" pitchFamily="34" charset="0"/>
+                <a:ea typeface="Helvetica" pitchFamily="34" charset="-122"/>
+                <a:cs typeface="Helvetica" pitchFamily="34" charset="-120"/>
+              </a:rPr>
+              <a:t>Asistente de atención y seguimiento instalado sin fricción.</a:t>
+            </a:r>
+            <a:endParaRPr lang="en-US" sz="1150" dirty="0"/>
+          </a:p>
+        </p:txBody>
+      </p:sp>
+      <p:sp>
+        <p:nvSpPr>
+          <p:cNvPr id="13" name="Text 11"/>
+          <p:cNvSpPr/>
+          <p:nvPr/>
+        </p:nvSpPr>
+        <p:spPr>
+          <a:xfrm>
+            <a:off x="3474720" y="3200400"/>
+            <a:ext cx="2286000" cy="1097280"/>
+          </a:xfrm>
+          <a:prstGeom prst="rect">
+            <a:avLst/>
+          </a:prstGeom>
+          <a:noFill/>
+          <a:ln/>
+        </p:spPr>
+        <p:txBody>
+          <a:bodyPr wrap="square" rtlCol="0" anchor="t"/>
+          <a:lstStyle/>
+          <a:p>
+            <a:pPr indent="0" marL="0">
+              <a:buNone/>
+            </a:pPr>
+            <a:r>
+              <a:rPr lang="en-US" sz="1050" i="1" dirty="0">
+                <a:solidFill>
+                  <a:srgbClr val="9DB8AA"/>
+                </a:solidFill>
+                <a:latin typeface="Helvetica" pitchFamily="34" charset="0"/>
+                <a:ea typeface="Helvetica" pitchFamily="34" charset="-122"/>
+                <a:cs typeface="Helvetica" pitchFamily="34" charset="-120"/>
+              </a:rPr>
+              <a:t>“Pensé que la implementación sería mucho más complicada, pero ha sido bastante fácil.”</a:t>
+            </a:r>
+            <a:endParaRPr lang="en-US" sz="1050" dirty="0"/>
+          </a:p>
+        </p:txBody>
+      </p:sp>
+      <p:sp>
+        <p:nvSpPr>
+          <p:cNvPr id="14" name="Shape 12"/>
+          <p:cNvSpPr/>
+          <p:nvPr/>
+        </p:nvSpPr>
+        <p:spPr>
+          <a:xfrm>
+            <a:off x="6126480" y="1463040"/>
+            <a:ext cx="2651760" cy="2926080"/>
+          </a:xfrm>
+          <a:prstGeom prst="roundRect">
+            <a:avLst>
+              <a:gd name="adj" fmla="val 3448"/>
+            </a:avLst>
+          </a:prstGeom>
+          <a:solidFill>
+            <a:srgbClr val="0D2118"/>
+          </a:solidFill>
+          <a:ln w="12700">
+            <a:solidFill>
+              <a:srgbClr val="1F3A2B"/>
+            </a:solidFill>
+            <a:prstDash val="solid"/>
+          </a:ln>
+        </p:spPr>
+      </p:sp>
+      <p:sp>
+        <p:nvSpPr>
+          <p:cNvPr id="15" name="Text 13"/>
+          <p:cNvSpPr/>
+          <p:nvPr/>
+        </p:nvSpPr>
+        <p:spPr>
+          <a:xfrm>
+            <a:off x="6309360" y="1554480"/>
+            <a:ext cx="2286000" cy="640080"/>
+          </a:xfrm>
+          <a:prstGeom prst="rect">
+            <a:avLst/>
+          </a:prstGeom>
+          <a:noFill/>
+          <a:ln/>
+        </p:spPr>
+        <p:txBody>
+          <a:bodyPr wrap="square" rtlCol="0" anchor="ctr"/>
+          <a:lstStyle/>
+          <a:p>
+            <a:pPr indent="0" marL="0">
+              <a:buNone/>
+            </a:pPr>
+            <a:r>
+              <a:rPr lang="en-US" sz="1300" b="1" dirty="0">
                 <a:solidFill>
                   <a:srgbClr val="E9F5EE"/>
                 </a:solidFill>
@@ -2718,51 +4471,87 @@
                 <a:ea typeface="Helvetica" pitchFamily="34" charset="-122"/>
                 <a:cs typeface="Helvetica" pitchFamily="34" charset="-120"/>
               </a:rPr>
-              <a:t>Agente de voz que contesta llamadas, orienta y toma los datos del paciente</a:t>
-            </a:r>
-            <a:endParaRPr lang="en-US" sz="1600" dirty="0"/>
-          </a:p>
-          <a:p>
-            <a:pPr marL="342900" indent="-342900">
-              <a:spcAft>
-                <a:spcPts val="800"/>
-              </a:spcAft>
-              <a:buSzPct val="100000"/>
-              <a:buChar char="●"/>
-            </a:pPr>
-            <a:r>
-              <a:rPr lang="en-US" sz="1600" dirty="0">
-                <a:solidFill>
-                  <a:srgbClr val="E9F5EE"/>
-                </a:solidFill>
-                <a:latin typeface="Helvetica" pitchFamily="34" charset="0"/>
-                <a:ea typeface="Helvetica" pitchFamily="34" charset="-122"/>
-                <a:cs typeface="Helvetica" pitchFamily="34" charset="-120"/>
-              </a:rPr>
-              <a:t>CRM configurado con el embudo de Skin Clinic PR: desde nuevo contacto hasta cita atendida</a:t>
-            </a:r>
-            <a:endParaRPr lang="en-US" sz="1600" dirty="0"/>
-          </a:p>
-          <a:p>
-            <a:pPr marL="342900" indent="-342900">
-              <a:spcAft>
-                <a:spcPts val="800"/>
-              </a:spcAft>
-              <a:buSzPct val="100000"/>
-              <a:buChar char="●"/>
-            </a:pPr>
-            <a:r>
-              <a:rPr lang="en-US" sz="1600" dirty="0">
-                <a:solidFill>
-                  <a:srgbClr val="E9F5EE"/>
-                </a:solidFill>
-                <a:latin typeface="Helvetica" pitchFamily="34" charset="0"/>
-                <a:ea typeface="Helvetica" pitchFamily="34" charset="-122"/>
-                <a:cs typeface="Helvetica" pitchFamily="34" charset="-120"/>
-              </a:rPr>
-              <a:t>Confirmaciones automaticas de citas para reducir las que se caen</a:t>
-            </a:r>
-            <a:endParaRPr lang="en-US" sz="1600" dirty="0"/>
+              <a:t>Clínicas, dentistas, contratistas y oficinas de servicio en toda la isla</a:t>
+            </a:r>
+            <a:endParaRPr lang="en-US" sz="1300" dirty="0"/>
+          </a:p>
+        </p:txBody>
+      </p:sp>
+      <p:sp>
+        <p:nvSpPr>
+          <p:cNvPr id="16" name="Text 14"/>
+          <p:cNvSpPr/>
+          <p:nvPr/>
+        </p:nvSpPr>
+        <p:spPr>
+          <a:xfrm>
+            <a:off x="6309360" y="2194560"/>
+            <a:ext cx="2286000" cy="1005840"/>
+          </a:xfrm>
+          <a:prstGeom prst="rect">
+            <a:avLst/>
+          </a:prstGeom>
+          <a:noFill/>
+          <a:ln/>
+        </p:spPr>
+        <p:txBody>
+          <a:bodyPr wrap="square" rtlCol="0" anchor="t"/>
+          <a:lstStyle/>
+          <a:p>
+            <a:pPr indent="0" marL="0">
+              <a:buNone/>
+            </a:pPr>
+            <a:r>
+              <a:rPr lang="en-US" sz="1150" dirty="0">
+                <a:solidFill>
+                  <a:srgbClr val="35C06F"/>
+                </a:solidFill>
+                <a:latin typeface="Helvetica" pitchFamily="34" charset="0"/>
+                <a:ea typeface="Helvetica" pitchFamily="34" charset="-122"/>
+                <a:cs typeface="Helvetica" pitchFamily="34" charset="-120"/>
+              </a:rPr>
+              <a:t>Recepción por voz, WhatsApp atendido 24/7 y CRM que no se entrega en blanco.</a:t>
+            </a:r>
+            <a:endParaRPr lang="en-US" sz="1150" dirty="0"/>
+          </a:p>
+        </p:txBody>
+      </p:sp>
+      <p:sp>
+        <p:nvSpPr>
+          <p:cNvPr id="17" name="Text 15"/>
+          <p:cNvSpPr/>
+          <p:nvPr/>
+        </p:nvSpPr>
+        <p:spPr>
+          <a:xfrm>
+            <a:off x="6309360" y="3200400"/>
+            <a:ext cx="2286000" cy="1097280"/>
+          </a:xfrm>
+          <a:prstGeom prst="rect">
+            <a:avLst/>
+          </a:prstGeom>
+          <a:noFill/>
+          <a:ln/>
+        </p:spPr>
+        <p:txBody>
+          <a:bodyPr wrap="square" rtlCol="0" anchor="t"/>
+          <a:lstStyle/>
+          <a:p>
+            <a:pPr indent="0" marL="0">
+              <a:buNone/>
+            </a:pPr>
+            <a:r>
+              <a:rPr lang="en-US" sz="1050" i="1" dirty="0">
+                <a:solidFill>
+                  <a:srgbClr val="9DB8AA"/>
+                </a:solidFill>
+                <a:latin typeface="Helvetica" pitchFamily="34" charset="0"/>
+                <a:ea typeface="Helvetica" pitchFamily="34" charset="-122"/>
+                <a:cs typeface="Helvetica" pitchFamily="34" charset="-120"/>
+              </a:rPr>
+              <a:t>Te presentamos al cliente de tu mismo rubro en la llamada.</a:t>
+            </a:r>
+            <a:endParaRPr lang="en-US" sz="1050" dirty="0"/>
           </a:p>
         </p:txBody>
       </p:sp>
@@ -2807,7 +4596,7 @@
         <p:spPr>
           <a:xfrm>
             <a:off x="365760" y="4754880"/>
-            <a:ext cx="3657600" cy="274320"/>
+            <a:ext cx="4572000" cy="274320"/>
           </a:xfrm>
           <a:prstGeom prst="rect">
             <a:avLst/>
@@ -2831,7 +4620,7 @@
                 <a:ea typeface="Helvetica" pitchFamily="34" charset="-122"/>
                 <a:cs typeface="Helvetica" pitchFamily="34" charset="-120"/>
               </a:rPr>
-              <a:t>AI Borinquen · AutoFlow</a:t>
+              <a:t>AI Borinquen · AutoFlow · Puerto Rico</a:t>
             </a:r>
             <a:endParaRPr lang="en-US" sz="900" dirty="0"/>
           </a:p>
@@ -2909,7 +4698,7 @@
                 <a:ea typeface="Helvetica" pitchFamily="34" charset="-122"/>
                 <a:cs typeface="Helvetica" pitchFamily="34" charset="-120"/>
               </a:rPr>
-              <a:t>PRUÉBALO TÚ MISMO</a:t>
+              <a:t>LO QUE VIMOS</a:t>
             </a:r>
             <a:endParaRPr lang="en-US" sz="1000" dirty="0"/>
           </a:p>
@@ -2948,7 +4737,7 @@
                 <a:ea typeface="Helvetica" pitchFamily="34" charset="-122"/>
                 <a:cs typeface="Helvetica" pitchFamily="34" charset="-120"/>
               </a:rPr>
-              <a:t>Ya está construido para ti</a:t>
+              <a:t>Lo que está pasando hoy en Skin Clinic PR</a:t>
             </a:r>
             <a:endParaRPr lang="en-US" sz="2800" dirty="0"/>
           </a:p>
@@ -2956,57 +4745,34 @@
       </p:sp>
       <p:sp>
         <p:nvSpPr>
-          <p:cNvPr id="6" name="Shape 4"/>
-          <p:cNvSpPr/>
-          <p:nvPr/>
-        </p:nvSpPr>
-        <p:spPr>
-          <a:xfrm>
-            <a:off x="457200" y="1554480"/>
-            <a:ext cx="2651760" cy="2194560"/>
-          </a:xfrm>
-          <a:prstGeom prst="roundRect">
-            <a:avLst>
-              <a:gd name="adj" fmla="val 4167"/>
-            </a:avLst>
-          </a:prstGeom>
-          <a:solidFill>
-            <a:srgbClr val="0D2118"/>
-          </a:solidFill>
-          <a:ln w="12700">
-            <a:solidFill>
-              <a:srgbClr val="1F3A2B"/>
-            </a:solidFill>
-            <a:prstDash val="solid"/>
-          </a:ln>
-        </p:spPr>
-      </p:sp>
-      <p:sp>
-        <p:nvSpPr>
-          <p:cNvPr id="7" name="Text 5"/>
-          <p:cNvSpPr/>
-          <p:nvPr/>
-        </p:nvSpPr>
-        <p:spPr>
-          <a:xfrm>
-            <a:off x="640080" y="1691640"/>
-            <a:ext cx="2286000" cy="457200"/>
-          </a:xfrm>
-          <a:prstGeom prst="rect">
-            <a:avLst/>
-          </a:prstGeom>
-          <a:noFill/>
-          <a:ln/>
-        </p:spPr>
-        <p:txBody>
-          <a:bodyPr wrap="square" rtlCol="0" anchor="ctr"/>
-          <a:lstStyle/>
-          <a:p>
-            <a:pPr indent="0" marL="0">
-              <a:buNone/>
-            </a:pPr>
-            <a:r>
-              <a:rPr lang="en-US" sz="1800" b="1" dirty="0">
+          <p:cNvPr id="6" name="Text 4"/>
+          <p:cNvSpPr/>
+          <p:nvPr/>
+        </p:nvSpPr>
+        <p:spPr>
+          <a:xfrm>
+            <a:off x="548640" y="1463040"/>
+            <a:ext cx="8046720" cy="3017520"/>
+          </a:xfrm>
+          <a:prstGeom prst="rect">
+            <a:avLst/>
+          </a:prstGeom>
+          <a:noFill/>
+          <a:ln/>
+        </p:spPr>
+        <p:txBody>
+          <a:bodyPr wrap="square" rtlCol="0" anchor="t"/>
+          <a:lstStyle/>
+          <a:p>
+            <a:pPr marL="342900" indent="-342900">
+              <a:spcAft>
+                <a:spcPts val="800"/>
+              </a:spcAft>
+              <a:buSzPct val="100000"/>
+              <a:buChar char="●"/>
+            </a:pPr>
+            <a:r>
+              <a:rPr lang="en-US" sz="1600" dirty="0">
                 <a:solidFill>
                   <a:srgbClr val="E9F5EE"/>
                 </a:solidFill>
@@ -3014,152 +4780,20 @@
                 <a:ea typeface="Helvetica" pitchFamily="34" charset="-122"/>
                 <a:cs typeface="Helvetica" pitchFamily="34" charset="-120"/>
               </a:rPr>
-              <a:t>💬 Chat</a:t>
-            </a:r>
-            <a:endParaRPr lang="en-US" sz="1800" dirty="0"/>
-          </a:p>
-        </p:txBody>
-      </p:sp>
-      <p:sp>
-        <p:nvSpPr>
-          <p:cNvPr id="8" name="Text 6"/>
-          <p:cNvSpPr/>
-          <p:nvPr/>
-        </p:nvSpPr>
-        <p:spPr>
-          <a:xfrm>
-            <a:off x="640080" y="2148840"/>
-            <a:ext cx="2286000" cy="731520"/>
-          </a:xfrm>
-          <a:prstGeom prst="rect">
-            <a:avLst/>
-          </a:prstGeom>
-          <a:noFill/>
-          <a:ln/>
-        </p:spPr>
-        <p:txBody>
-          <a:bodyPr wrap="square" rtlCol="0" anchor="ctr"/>
-          <a:lstStyle/>
-          <a:p>
-            <a:pPr indent="0" marL="0">
-              <a:buNone/>
-            </a:pPr>
-            <a:r>
-              <a:rPr lang="en-US" sz="1200" dirty="0">
-                <a:solidFill>
-                  <a:srgbClr val="9DB8AA"/>
-                </a:solidFill>
-                <a:latin typeface="Helvetica" pitchFamily="34" charset="0"/>
-                <a:ea typeface="Helvetica" pitchFamily="34" charset="-122"/>
-                <a:cs typeface="Helvetica" pitchFamily="34" charset="-120"/>
-              </a:rPr>
-              <a:t>Escríbele a Nicole como cliente</a:t>
-            </a:r>
-            <a:endParaRPr lang="en-US" sz="1200" dirty="0"/>
-          </a:p>
-        </p:txBody>
-      </p:sp>
-      <p:sp>
-        <p:nvSpPr>
-          <p:cNvPr id="9" name="Text 7">
-            <a:hlinkClick r:id="rId1" tooltip=""/>
-          </p:cNvPr>
-          <p:cNvSpPr/>
-          <p:nvPr/>
-        </p:nvSpPr>
-        <p:spPr>
-          <a:xfrm>
-            <a:off x="640080" y="3017520"/>
-            <a:ext cx="2286000" cy="548640"/>
-          </a:xfrm>
-          <a:prstGeom prst="rect">
-            <a:avLst/>
-          </a:prstGeom>
-          <a:noFill/>
-          <a:ln/>
-        </p:spPr>
-        <p:txBody>
-          <a:bodyPr wrap="square" rtlCol="0" anchor="ctr"/>
-          <a:lstStyle/>
-          <a:p>
-            <a:pPr indent="0" marL="0">
-              <a:buNone/>
-            </a:pPr>
-            <a:r>
-              <a:rPr lang="en-US" sz="900" u="sng" dirty="0">
-                <a:solidFill>
-                  <a:srgbClr val="35C06F"/>
-                </a:solidFill>
-                <a:latin typeface="Helvetica" pitchFamily="34" charset="0"/>
-                <a:ea typeface="Helvetica" pitchFamily="34" charset="-122"/>
-                <a:cs typeface="Helvetica" pitchFamily="34" charset="-120"/>
-                <a:hlinkClick r:id="rId1" invalidUrl="" action="" tgtFrame="" tooltip="" history="1" highlightClick="0" endSnd="0">
-                  <a:extLst>
-                    <a:ext uri="{A12FA001-AC4F-418D-AE19-62706E023703}">
-                      <ahyp:hlinkClr xmlns:ahyp="http://schemas.microsoft.com/office/drawing/2018/hyperlinkcolor" val="tx"/>
-                    </a:ext>
-                  </a:extLst>
-                </a:hlinkClick>
-              </a:rPr>
-              <a:t>chat/</a:t>
-            </a:r>
-            <a:endParaRPr lang="en-US" sz="900" dirty="0"/>
-          </a:p>
-        </p:txBody>
-      </p:sp>
-      <p:sp>
-        <p:nvSpPr>
-          <p:cNvPr id="10" name="Shape 8"/>
-          <p:cNvSpPr/>
-          <p:nvPr/>
-        </p:nvSpPr>
-        <p:spPr>
-          <a:xfrm>
-            <a:off x="3291840" y="1554480"/>
-            <a:ext cx="2651760" cy="2194560"/>
-          </a:xfrm>
-          <a:prstGeom prst="roundRect">
-            <a:avLst>
-              <a:gd name="adj" fmla="val 4167"/>
-            </a:avLst>
-          </a:prstGeom>
-          <a:solidFill>
-            <a:srgbClr val="0D2118"/>
-          </a:solidFill>
-          <a:ln w="12700">
-            <a:solidFill>
-              <a:srgbClr val="1F3A2B"/>
-            </a:solidFill>
-            <a:prstDash val="solid"/>
-          </a:ln>
-        </p:spPr>
-      </p:sp>
-      <p:sp>
-        <p:nvSpPr>
-          <p:cNvPr id="11" name="Text 9"/>
-          <p:cNvSpPr/>
-          <p:nvPr/>
-        </p:nvSpPr>
-        <p:spPr>
-          <a:xfrm>
-            <a:off x="3474720" y="1691640"/>
-            <a:ext cx="2286000" cy="457200"/>
-          </a:xfrm>
-          <a:prstGeom prst="rect">
-            <a:avLst/>
-          </a:prstGeom>
-          <a:noFill/>
-          <a:ln/>
-        </p:spPr>
-        <p:txBody>
-          <a:bodyPr wrap="square" rtlCol="0" anchor="ctr"/>
-          <a:lstStyle/>
-          <a:p>
-            <a:pPr indent="0" marL="0">
-              <a:buNone/>
-            </a:pPr>
-            <a:r>
-              <a:rPr lang="en-US" sz="1800" b="1" dirty="0">
+              <a:t>Mensajes de Instagram y WhatsApp llegan de noche y quedan sin responder hasta el otro dia</a:t>
+            </a:r>
+            <a:endParaRPr lang="en-US" sz="1600" dirty="0"/>
+          </a:p>
+          <a:p>
+            <a:pPr marL="342900" indent="-342900">
+              <a:spcAft>
+                <a:spcPts val="800"/>
+              </a:spcAft>
+              <a:buSzPct val="100000"/>
+              <a:buChar char="●"/>
+            </a:pPr>
+            <a:r>
+              <a:rPr lang="en-US" sz="1600" dirty="0">
                 <a:solidFill>
                   <a:srgbClr val="E9F5EE"/>
                 </a:solidFill>
@@ -3167,152 +4801,20 @@
                 <a:ea typeface="Helvetica" pitchFamily="34" charset="-122"/>
                 <a:cs typeface="Helvetica" pitchFamily="34" charset="-120"/>
               </a:rPr>
-              <a:t>📞 Voz</a:t>
-            </a:r>
-            <a:endParaRPr lang="en-US" sz="1800" dirty="0"/>
-          </a:p>
-        </p:txBody>
-      </p:sp>
-      <p:sp>
-        <p:nvSpPr>
-          <p:cNvPr id="12" name="Text 10"/>
-          <p:cNvSpPr/>
-          <p:nvPr/>
-        </p:nvSpPr>
-        <p:spPr>
-          <a:xfrm>
-            <a:off x="3474720" y="2148840"/>
-            <a:ext cx="2286000" cy="731520"/>
-          </a:xfrm>
-          <a:prstGeom prst="rect">
-            <a:avLst/>
-          </a:prstGeom>
-          <a:noFill/>
-          <a:ln/>
-        </p:spPr>
-        <p:txBody>
-          <a:bodyPr wrap="square" rtlCol="0" anchor="ctr"/>
-          <a:lstStyle/>
-          <a:p>
-            <a:pPr indent="0" marL="0">
-              <a:buNone/>
-            </a:pPr>
-            <a:r>
-              <a:rPr lang="en-US" sz="1200" dirty="0">
-                <a:solidFill>
-                  <a:srgbClr val="9DB8AA"/>
-                </a:solidFill>
-                <a:latin typeface="Helvetica" pitchFamily="34" charset="0"/>
-                <a:ea typeface="Helvetica" pitchFamily="34" charset="-122"/>
-                <a:cs typeface="Helvetica" pitchFamily="34" charset="-120"/>
-              </a:rPr>
-              <a:t>Habla con Nicole</a:t>
-            </a:r>
-            <a:endParaRPr lang="en-US" sz="1200" dirty="0"/>
-          </a:p>
-        </p:txBody>
-      </p:sp>
-      <p:sp>
-        <p:nvSpPr>
-          <p:cNvPr id="13" name="Text 11">
-            <a:hlinkClick r:id="rId2" tooltip=""/>
-          </p:cNvPr>
-          <p:cNvSpPr/>
-          <p:nvPr/>
-        </p:nvSpPr>
-        <p:spPr>
-          <a:xfrm>
-            <a:off x="3474720" y="3017520"/>
-            <a:ext cx="2286000" cy="548640"/>
-          </a:xfrm>
-          <a:prstGeom prst="rect">
-            <a:avLst/>
-          </a:prstGeom>
-          <a:noFill/>
-          <a:ln/>
-        </p:spPr>
-        <p:txBody>
-          <a:bodyPr wrap="square" rtlCol="0" anchor="ctr"/>
-          <a:lstStyle/>
-          <a:p>
-            <a:pPr indent="0" marL="0">
-              <a:buNone/>
-            </a:pPr>
-            <a:r>
-              <a:rPr lang="en-US" sz="900" u="sng" dirty="0">
-                <a:solidFill>
-                  <a:srgbClr val="35C06F"/>
-                </a:solidFill>
-                <a:latin typeface="Helvetica" pitchFamily="34" charset="0"/>
-                <a:ea typeface="Helvetica" pitchFamily="34" charset="-122"/>
-                <a:cs typeface="Helvetica" pitchFamily="34" charset="-120"/>
-                <a:hlinkClick r:id="rId2" invalidUrl="" action="" tgtFrame="" tooltip="" history="1" highlightClick="0" endSnd="0">
-                  <a:extLst>
-                    <a:ext uri="{A12FA001-AC4F-418D-AE19-62706E023703}">
-                      <ahyp:hlinkClr xmlns:ahyp="http://schemas.microsoft.com/office/drawing/2018/hyperlinkcolor" val="tx"/>
-                    </a:ext>
-                  </a:extLst>
-                </a:hlinkClick>
-              </a:rPr>
-              <a:t>voz/</a:t>
-            </a:r>
-            <a:endParaRPr lang="en-US" sz="900" dirty="0"/>
-          </a:p>
-        </p:txBody>
-      </p:sp>
-      <p:sp>
-        <p:nvSpPr>
-          <p:cNvPr id="14" name="Shape 12"/>
-          <p:cNvSpPr/>
-          <p:nvPr/>
-        </p:nvSpPr>
-        <p:spPr>
-          <a:xfrm>
-            <a:off x="6126480" y="1554480"/>
-            <a:ext cx="2651760" cy="2194560"/>
-          </a:xfrm>
-          <a:prstGeom prst="roundRect">
-            <a:avLst>
-              <a:gd name="adj" fmla="val 4167"/>
-            </a:avLst>
-          </a:prstGeom>
-          <a:solidFill>
-            <a:srgbClr val="0D2118"/>
-          </a:solidFill>
-          <a:ln w="12700">
-            <a:solidFill>
-              <a:srgbClr val="1F3A2B"/>
-            </a:solidFill>
-            <a:prstDash val="solid"/>
-          </a:ln>
-        </p:spPr>
-      </p:sp>
-      <p:sp>
-        <p:nvSpPr>
-          <p:cNvPr id="15" name="Text 13"/>
-          <p:cNvSpPr/>
-          <p:nvPr/>
-        </p:nvSpPr>
-        <p:spPr>
-          <a:xfrm>
-            <a:off x="6309360" y="1691640"/>
-            <a:ext cx="2286000" cy="457200"/>
-          </a:xfrm>
-          <a:prstGeom prst="rect">
-            <a:avLst/>
-          </a:prstGeom>
-          <a:noFill/>
-          <a:ln/>
-        </p:spPr>
-        <p:txBody>
-          <a:bodyPr wrap="square" rtlCol="0" anchor="ctr"/>
-          <a:lstStyle/>
-          <a:p>
-            <a:pPr indent="0" marL="0">
-              <a:buNone/>
-            </a:pPr>
-            <a:r>
-              <a:rPr lang="en-US" sz="1800" b="1" dirty="0">
+              <a:t>Citas que se caen porque nadie las confirma a tiempo</a:t>
+            </a:r>
+            <a:endParaRPr lang="en-US" sz="1600" dirty="0"/>
+          </a:p>
+          <a:p>
+            <a:pPr marL="342900" indent="-342900">
+              <a:spcAft>
+                <a:spcPts val="800"/>
+              </a:spcAft>
+              <a:buSzPct val="100000"/>
+              <a:buChar char="●"/>
+            </a:pPr>
+            <a:r>
+              <a:rPr lang="en-US" sz="1600" dirty="0">
                 <a:solidFill>
                   <a:srgbClr val="E9F5EE"/>
                 </a:solidFill>
@@ -3320,96 +4822,30 @@
                 <a:ea typeface="Helvetica" pitchFamily="34" charset="-122"/>
                 <a:cs typeface="Helvetica" pitchFamily="34" charset="-120"/>
               </a:rPr>
-              <a:t>🖥️ Por dentro</a:t>
-            </a:r>
-            <a:endParaRPr lang="en-US" sz="1800" dirty="0"/>
-          </a:p>
-        </p:txBody>
-      </p:sp>
-      <p:sp>
-        <p:nvSpPr>
-          <p:cNvPr id="16" name="Text 14"/>
-          <p:cNvSpPr/>
-          <p:nvPr/>
-        </p:nvSpPr>
-        <p:spPr>
-          <a:xfrm>
-            <a:off x="6309360" y="2148840"/>
-            <a:ext cx="2286000" cy="731520"/>
-          </a:xfrm>
-          <a:prstGeom prst="rect">
-            <a:avLst/>
-          </a:prstGeom>
-          <a:noFill/>
-          <a:ln/>
-        </p:spPr>
-        <p:txBody>
-          <a:bodyPr wrap="square" rtlCol="0" anchor="ctr"/>
-          <a:lstStyle/>
-          <a:p>
-            <a:pPr indent="0" marL="0">
-              <a:buNone/>
-            </a:pPr>
-            <a:r>
-              <a:rPr lang="en-US" sz="1200" dirty="0">
-                <a:solidFill>
-                  <a:srgbClr val="9DB8AA"/>
-                </a:solidFill>
-                <a:latin typeface="Helvetica" pitchFamily="34" charset="0"/>
-                <a:ea typeface="Helvetica" pitchFamily="34" charset="-122"/>
-                <a:cs typeface="Helvetica" pitchFamily="34" charset="-120"/>
-              </a:rPr>
-              <a:t>Embudo, conversaciones y agenda</a:t>
-            </a:r>
-            <a:endParaRPr lang="en-US" sz="1200" dirty="0"/>
-          </a:p>
-        </p:txBody>
-      </p:sp>
-      <p:sp>
-        <p:nvSpPr>
-          <p:cNvPr id="17" name="Text 15">
-            <a:hlinkClick r:id="rId3" tooltip=""/>
-          </p:cNvPr>
-          <p:cNvSpPr/>
-          <p:nvPr/>
-        </p:nvSpPr>
-        <p:spPr>
-          <a:xfrm>
-            <a:off x="6309360" y="3017520"/>
-            <a:ext cx="2286000" cy="548640"/>
-          </a:xfrm>
-          <a:prstGeom prst="rect">
-            <a:avLst/>
-          </a:prstGeom>
-          <a:noFill/>
-          <a:ln/>
-        </p:spPr>
-        <p:txBody>
-          <a:bodyPr wrap="square" rtlCol="0" anchor="ctr"/>
-          <a:lstStyle/>
-          <a:p>
-            <a:pPr indent="0" marL="0">
-              <a:buNone/>
-            </a:pPr>
-            <a:r>
-              <a:rPr lang="en-US" sz="900" u="sng" dirty="0">
-                <a:solidFill>
-                  <a:srgbClr val="35C06F"/>
-                </a:solidFill>
-                <a:latin typeface="Helvetica" pitchFamily="34" charset="0"/>
-                <a:ea typeface="Helvetica" pitchFamily="34" charset="-122"/>
-                <a:cs typeface="Helvetica" pitchFamily="34" charset="-120"/>
-                <a:hlinkClick r:id="rId3" invalidUrl="" action="" tgtFrame="" tooltip="" history="1" highlightClick="0" endSnd="0">
-                  <a:extLst>
-                    <a:ext uri="{A12FA001-AC4F-418D-AE19-62706E023703}">
-                      <ahyp:hlinkClr xmlns:ahyp="http://schemas.microsoft.com/office/drawing/2018/hyperlinkcolor" val="tx"/>
-                    </a:ext>
-                  </a:extLst>
-                </a:hlinkClick>
-              </a:rPr>
-              <a:t>(link al MVP)/sistema/</a:t>
-            </a:r>
-            <a:endParaRPr lang="en-US" sz="900" dirty="0"/>
+              <a:t>Recepcion no da abasto con las consultas repetidas de precios de tratamientos</a:t>
+            </a:r>
+            <a:endParaRPr lang="en-US" sz="1600" dirty="0"/>
+          </a:p>
+          <a:p>
+            <a:pPr marL="342900" indent="-342900">
+              <a:spcAft>
+                <a:spcPts val="800"/>
+              </a:spcAft>
+              <a:buSzPct val="100000"/>
+              <a:buChar char="●"/>
+            </a:pPr>
+            <a:r>
+              <a:rPr lang="en-US" sz="1600" dirty="0">
+                <a:solidFill>
+                  <a:srgbClr val="E9F5EE"/>
+                </a:solidFill>
+                <a:latin typeface="Helvetica" pitchFamily="34" charset="0"/>
+                <a:ea typeface="Helvetica" pitchFamily="34" charset="-122"/>
+                <a:cs typeface="Helvetica" pitchFamily="34" charset="-120"/>
+              </a:rPr>
+              <a:t>Comunidad activa de 40K seguidores en Instagram (@skinclinicpr) generando consultas constantes</a:t>
+            </a:r>
+            <a:endParaRPr lang="en-US" sz="1600" dirty="0"/>
           </a:p>
         </p:txBody>
       </p:sp>
@@ -3454,7 +4890,7 @@
         <p:spPr>
           <a:xfrm>
             <a:off x="365760" y="4754880"/>
-            <a:ext cx="3657600" cy="274320"/>
+            <a:ext cx="4572000" cy="274320"/>
           </a:xfrm>
           <a:prstGeom prst="rect">
             <a:avLst/>
@@ -3478,7 +4914,7 @@
                 <a:ea typeface="Helvetica" pitchFamily="34" charset="-122"/>
                 <a:cs typeface="Helvetica" pitchFamily="34" charset="-120"/>
               </a:rPr>
-              <a:t>AI Borinquen · AutoFlow</a:t>
+              <a:t>AI Borinquen · AutoFlow · Puerto Rico</a:t>
             </a:r>
             <a:endParaRPr lang="en-US" sz="900" dirty="0"/>
           </a:p>
@@ -3556,7 +4992,7 @@
                 <a:ea typeface="Helvetica" pitchFamily="34" charset="-122"/>
                 <a:cs typeface="Helvetica" pitchFamily="34" charset="-120"/>
               </a:rPr>
-              <a:t>LA CUENTA QUE NADIE TE HACE</a:t>
+              <a:t>LO QUE CUESTA</a:t>
             </a:r>
             <a:endParaRPr lang="en-US" sz="1000" dirty="0"/>
           </a:p>
@@ -3595,6 +5031,1284 @@
                 <a:ea typeface="Helvetica" pitchFamily="34" charset="-122"/>
                 <a:cs typeface="Helvetica" pitchFamily="34" charset="-120"/>
               </a:rPr>
+              <a:t>Cada hora sin responder tiene un precio</a:t>
+            </a:r>
+            <a:endParaRPr lang="en-US" sz="2800" dirty="0"/>
+          </a:p>
+        </p:txBody>
+      </p:sp>
+      <p:sp>
+        <p:nvSpPr>
+          <p:cNvPr id="6" name="Text 4"/>
+          <p:cNvSpPr/>
+          <p:nvPr/>
+        </p:nvSpPr>
+        <p:spPr>
+          <a:xfrm>
+            <a:off x="548640" y="1463040"/>
+            <a:ext cx="8046720" cy="2011680"/>
+          </a:xfrm>
+          <a:prstGeom prst="rect">
+            <a:avLst/>
+          </a:prstGeom>
+          <a:noFill/>
+          <a:ln/>
+        </p:spPr>
+        <p:txBody>
+          <a:bodyPr wrap="square" rtlCol="0" anchor="t"/>
+          <a:lstStyle/>
+          <a:p>
+            <a:pPr marL="342900" indent="-342900">
+              <a:spcAft>
+                <a:spcPts val="800"/>
+              </a:spcAft>
+              <a:buSzPct val="100000"/>
+              <a:buChar char="●"/>
+            </a:pPr>
+            <a:r>
+              <a:rPr lang="en-US" sz="1600" dirty="0">
+                <a:solidFill>
+                  <a:srgbClr val="E9F5EE"/>
+                </a:solidFill>
+                <a:latin typeface="Helvetica" pitchFamily="34" charset="0"/>
+                <a:ea typeface="Helvetica" pitchFamily="34" charset="-122"/>
+                <a:cs typeface="Helvetica" pitchFamily="34" charset="-120"/>
+              </a:rPr>
+              <a:t>El 78% de los clientes elige al negocio que responde primero, y hoy esas respuestas llegan tarde</a:t>
+            </a:r>
+            <a:endParaRPr lang="en-US" sz="1600" dirty="0"/>
+          </a:p>
+          <a:p>
+            <a:pPr marL="342900" indent="-342900">
+              <a:spcAft>
+                <a:spcPts val="800"/>
+              </a:spcAft>
+              <a:buSzPct val="100000"/>
+              <a:buChar char="●"/>
+            </a:pPr>
+            <a:r>
+              <a:rPr lang="en-US" sz="1600" dirty="0">
+                <a:solidFill>
+                  <a:srgbClr val="E9F5EE"/>
+                </a:solidFill>
+                <a:latin typeface="Helvetica" pitchFamily="34" charset="0"/>
+                <a:ea typeface="Helvetica" pitchFamily="34" charset="-122"/>
+                <a:cs typeface="Helvetica" pitchFamily="34" charset="-120"/>
+              </a:rPr>
+              <a:t>El 67% de los mensajes fuera de horario se pierden sin seguimiento</a:t>
+            </a:r>
+            <a:endParaRPr lang="en-US" sz="1600" dirty="0"/>
+          </a:p>
+          <a:p>
+            <a:pPr marL="342900" indent="-342900">
+              <a:spcAft>
+                <a:spcPts val="800"/>
+              </a:spcAft>
+              <a:buSzPct val="100000"/>
+              <a:buChar char="●"/>
+            </a:pPr>
+            <a:r>
+              <a:rPr lang="en-US" sz="1600" dirty="0">
+                <a:solidFill>
+                  <a:srgbClr val="E9F5EE"/>
+                </a:solidFill>
+                <a:latin typeface="Helvetica" pitchFamily="34" charset="0"/>
+                <a:ea typeface="Helvetica" pitchFamily="34" charset="-122"/>
+                <a:cs typeface="Helvetica" pitchFamily="34" charset="-120"/>
+              </a:rPr>
+              <a:t>Cada cita que se cae por falta de confirmacion es tiempo y espacio en agenda que no se recupera</a:t>
+            </a:r>
+            <a:endParaRPr lang="en-US" sz="1600" dirty="0"/>
+          </a:p>
+        </p:txBody>
+      </p:sp>
+      <p:sp>
+        <p:nvSpPr>
+          <p:cNvPr id="7" name="Shape 5"/>
+          <p:cNvSpPr/>
+          <p:nvPr/>
+        </p:nvSpPr>
+        <p:spPr>
+          <a:xfrm>
+            <a:off x="548640" y="3566160"/>
+            <a:ext cx="8046720" cy="914400"/>
+          </a:xfrm>
+          <a:prstGeom prst="rect">
+            <a:avLst/>
+          </a:prstGeom>
+          <a:solidFill>
+            <a:srgbClr val="0D2118"/>
+          </a:solidFill>
+          <a:ln w="12700">
+            <a:solidFill>
+              <a:srgbClr val="1F3A2B"/>
+            </a:solidFill>
+            <a:prstDash val="solid"/>
+          </a:ln>
+        </p:spPr>
+      </p:sp>
+      <p:sp>
+        <p:nvSpPr>
+          <p:cNvPr id="8" name="Text 6"/>
+          <p:cNvSpPr/>
+          <p:nvPr/>
+        </p:nvSpPr>
+        <p:spPr>
+          <a:xfrm>
+            <a:off x="731520" y="3611880"/>
+            <a:ext cx="7680960" cy="822960"/>
+          </a:xfrm>
+          <a:prstGeom prst="rect">
+            <a:avLst/>
+          </a:prstGeom>
+          <a:noFill/>
+          <a:ln/>
+        </p:spPr>
+        <p:txBody>
+          <a:bodyPr wrap="square" rtlCol="0" anchor="ctr"/>
+          <a:lstStyle/>
+          <a:p>
+            <a:pPr indent="0" marL="0">
+              <a:buNone/>
+            </a:pPr>
+            <a:r>
+              <a:rPr lang="en-US" sz="1300" dirty="0">
+                <a:solidFill>
+                  <a:srgbClr val="E0A93C"/>
+                </a:solidFill>
+                <a:latin typeface="Helvetica" pitchFamily="34" charset="0"/>
+                <a:ea typeface="Helvetica" pitchFamily="34" charset="-122"/>
+                <a:cs typeface="Helvetica" pitchFamily="34" charset="-120"/>
+              </a:rPr>
+              <a:t>78% de los clientes cierran con el primero que responde · 67% se van tras una mala experiencia</a:t>
+            </a:r>
+            <a:endParaRPr lang="en-US" sz="1300" dirty="0"/>
+          </a:p>
+        </p:txBody>
+      </p:sp>
+    </p:spTree>
+  </p:cSld>
+  <p:clrMapOvr>
+    <a:masterClrMapping/>
+  </p:clrMapOvr>
+</p:sld>
+</file>
+
+<file path=ppt/slides/slide7.xml><?xml version="1.0" encoding="utf-8"?>
+<p:sld xmlns:a="http://schemas.openxmlformats.org/drawingml/2006/main" xmlns:r="http://schemas.openxmlformats.org/officeDocument/2006/relationships" xmlns:p="http://schemas.openxmlformats.org/presentationml/2006/main">
+  <p:cSld name="Slide 7">
+    <p:bg>
+      <p:bgPr>
+        <a:solidFill>
+          <a:srgbClr val="07160F"/>
+        </a:solidFill>
+      </p:bgPr>
+    </p:bg>
+    <p:spTree>
+      <p:nvGrpSpPr>
+        <p:cNvPr id="1" name=""/>
+        <p:cNvGrpSpPr/>
+        <p:nvPr/>
+      </p:nvGrpSpPr>
+      <p:grpSpPr>
+        <a:xfrm>
+          <a:off x="0" y="0"/>
+          <a:ext cx="0" cy="0"/>
+          <a:chOff x="0" y="0"/>
+          <a:chExt cx="0" cy="0"/>
+        </a:xfrm>
+      </p:grpSpPr>
+      <p:sp>
+        <p:nvSpPr>
+          <p:cNvPr id="2" name="Text 0"/>
+          <p:cNvSpPr/>
+          <p:nvPr/>
+        </p:nvSpPr>
+        <p:spPr>
+          <a:xfrm>
+            <a:off x="365760" y="4754880"/>
+            <a:ext cx="4572000" cy="274320"/>
+          </a:xfrm>
+          <a:prstGeom prst="rect">
+            <a:avLst/>
+          </a:prstGeom>
+          <a:noFill/>
+          <a:ln/>
+        </p:spPr>
+        <p:txBody>
+          <a:bodyPr wrap="square" rtlCol="0" anchor="ctr"/>
+          <a:lstStyle/>
+          <a:p>
+            <a:pPr indent="0" marL="0">
+              <a:buNone/>
+            </a:pPr>
+            <a:r>
+              <a:rPr lang="en-US" sz="900" dirty="0">
+                <a:solidFill>
+                  <a:srgbClr val="9DB8AA"/>
+                </a:solidFill>
+                <a:latin typeface="Helvetica" pitchFamily="34" charset="0"/>
+                <a:ea typeface="Helvetica" pitchFamily="34" charset="-122"/>
+                <a:cs typeface="Helvetica" pitchFamily="34" charset="-120"/>
+              </a:rPr>
+              <a:t>AI Borinquen · AutoFlow · Puerto Rico</a:t>
+            </a:r>
+            <a:endParaRPr lang="en-US" sz="900" dirty="0"/>
+          </a:p>
+        </p:txBody>
+      </p:sp>
+      <p:sp>
+        <p:nvSpPr>
+          <p:cNvPr id="3" name="Text 1"/>
+          <p:cNvSpPr/>
+          <p:nvPr/>
+        </p:nvSpPr>
+        <p:spPr>
+          <a:xfrm>
+            <a:off x="5120640" y="4754880"/>
+            <a:ext cx="3657600" cy="274320"/>
+          </a:xfrm>
+          <a:prstGeom prst="rect">
+            <a:avLst/>
+          </a:prstGeom>
+          <a:noFill/>
+          <a:ln/>
+        </p:spPr>
+        <p:txBody>
+          <a:bodyPr wrap="square" rtlCol="0" anchor="ctr"/>
+          <a:lstStyle/>
+          <a:p>
+            <a:pPr algn="r" indent="0" marL="0">
+              <a:buNone/>
+            </a:pPr>
+            <a:r>
+              <a:rPr lang="en-US" sz="900" dirty="0">
+                <a:solidFill>
+                  <a:srgbClr val="9DB8AA"/>
+                </a:solidFill>
+                <a:latin typeface="Helvetica" pitchFamily="34" charset="0"/>
+                <a:ea typeface="Helvetica" pitchFamily="34" charset="-122"/>
+                <a:cs typeface="Helvetica" pitchFamily="34" charset="-120"/>
+              </a:rPr>
+              <a:t>Skin Clinic PR</a:t>
+            </a:r>
+            <a:endParaRPr lang="en-US" sz="900" dirty="0"/>
+          </a:p>
+        </p:txBody>
+      </p:sp>
+      <p:sp>
+        <p:nvSpPr>
+          <p:cNvPr id="4" name="Text 2"/>
+          <p:cNvSpPr/>
+          <p:nvPr/>
+        </p:nvSpPr>
+        <p:spPr>
+          <a:xfrm>
+            <a:off x="457200" y="320040"/>
+            <a:ext cx="8229600" cy="274320"/>
+          </a:xfrm>
+          <a:prstGeom prst="rect">
+            <a:avLst/>
+          </a:prstGeom>
+          <a:noFill/>
+          <a:ln/>
+        </p:spPr>
+        <p:txBody>
+          <a:bodyPr wrap="square" rtlCol="0" anchor="ctr"/>
+          <a:lstStyle/>
+          <a:p>
+            <a:pPr indent="0" marL="0">
+              <a:buNone/>
+            </a:pPr>
+            <a:r>
+              <a:rPr lang="en-US" sz="1000" b="1" spc="300" kern="0" dirty="0">
+                <a:solidFill>
+                  <a:srgbClr val="35C06F"/>
+                </a:solidFill>
+                <a:latin typeface="Helvetica" pitchFamily="34" charset="0"/>
+                <a:ea typeface="Helvetica" pitchFamily="34" charset="-122"/>
+                <a:cs typeface="Helvetica" pitchFamily="34" charset="-120"/>
+              </a:rPr>
+              <a:t>EL SISTEMA</a:t>
+            </a:r>
+            <a:endParaRPr lang="en-US" sz="1000" dirty="0"/>
+          </a:p>
+        </p:txBody>
+      </p:sp>
+      <p:sp>
+        <p:nvSpPr>
+          <p:cNvPr id="5" name="Text 3"/>
+          <p:cNvSpPr/>
+          <p:nvPr/>
+        </p:nvSpPr>
+        <p:spPr>
+          <a:xfrm>
+            <a:off x="457200" y="594360"/>
+            <a:ext cx="8229600" cy="731520"/>
+          </a:xfrm>
+          <a:prstGeom prst="rect">
+            <a:avLst/>
+          </a:prstGeom>
+          <a:noFill/>
+          <a:ln/>
+        </p:spPr>
+        <p:txBody>
+          <a:bodyPr wrap="square" rtlCol="0" anchor="ctr"/>
+          <a:lstStyle/>
+          <a:p>
+            <a:pPr indent="0" marL="0">
+              <a:buNone/>
+            </a:pPr>
+            <a:r>
+              <a:rPr lang="en-US" sz="2800" b="1" dirty="0">
+                <a:solidFill>
+                  <a:srgbClr val="E9F5EE"/>
+                </a:solidFill>
+                <a:latin typeface="Helvetica" pitchFamily="34" charset="0"/>
+                <a:ea typeface="Helvetica" pitchFamily="34" charset="-122"/>
+                <a:cs typeface="Helvetica" pitchFamily="34" charset="-120"/>
+              </a:rPr>
+              <a:t>Así queda Skin Clinic PR con AutoFlow</a:t>
+            </a:r>
+            <a:endParaRPr lang="en-US" sz="2800" dirty="0"/>
+          </a:p>
+        </p:txBody>
+      </p:sp>
+      <p:sp>
+        <p:nvSpPr>
+          <p:cNvPr id="6" name="Text 4"/>
+          <p:cNvSpPr/>
+          <p:nvPr/>
+        </p:nvSpPr>
+        <p:spPr>
+          <a:xfrm>
+            <a:off x="548640" y="1463040"/>
+            <a:ext cx="8046720" cy="3017520"/>
+          </a:xfrm>
+          <a:prstGeom prst="rect">
+            <a:avLst/>
+          </a:prstGeom>
+          <a:noFill/>
+          <a:ln/>
+        </p:spPr>
+        <p:txBody>
+          <a:bodyPr wrap="square" rtlCol="0" anchor="t"/>
+          <a:lstStyle/>
+          <a:p>
+            <a:pPr marL="342900" indent="-342900">
+              <a:spcAft>
+                <a:spcPts val="800"/>
+              </a:spcAft>
+              <a:buSzPct val="100000"/>
+              <a:buChar char="●"/>
+            </a:pPr>
+            <a:r>
+              <a:rPr lang="en-US" sz="1600" dirty="0">
+                <a:solidFill>
+                  <a:srgbClr val="E9F5EE"/>
+                </a:solidFill>
+                <a:latin typeface="Helvetica" pitchFamily="34" charset="0"/>
+                <a:ea typeface="Helvetica" pitchFamily="34" charset="-122"/>
+                <a:cs typeface="Helvetica" pitchFamily="34" charset="-120"/>
+              </a:rPr>
+              <a:t>Agente de chat en Instagram y WhatsApp respondiendo preguntas de servicios y precios las 24 horas</a:t>
+            </a:r>
+            <a:endParaRPr lang="en-US" sz="1600" dirty="0"/>
+          </a:p>
+          <a:p>
+            <a:pPr marL="342900" indent="-342900">
+              <a:spcAft>
+                <a:spcPts val="800"/>
+              </a:spcAft>
+              <a:buSzPct val="100000"/>
+              <a:buChar char="●"/>
+            </a:pPr>
+            <a:r>
+              <a:rPr lang="en-US" sz="1600" dirty="0">
+                <a:solidFill>
+                  <a:srgbClr val="E9F5EE"/>
+                </a:solidFill>
+                <a:latin typeface="Helvetica" pitchFamily="34" charset="0"/>
+                <a:ea typeface="Helvetica" pitchFamily="34" charset="-122"/>
+                <a:cs typeface="Helvetica" pitchFamily="34" charset="-120"/>
+              </a:rPr>
+              <a:t>Agente de voz que contesta llamadas, orienta y toma los datos del paciente</a:t>
+            </a:r>
+            <a:endParaRPr lang="en-US" sz="1600" dirty="0"/>
+          </a:p>
+          <a:p>
+            <a:pPr marL="342900" indent="-342900">
+              <a:spcAft>
+                <a:spcPts val="800"/>
+              </a:spcAft>
+              <a:buSzPct val="100000"/>
+              <a:buChar char="●"/>
+            </a:pPr>
+            <a:r>
+              <a:rPr lang="en-US" sz="1600" dirty="0">
+                <a:solidFill>
+                  <a:srgbClr val="E9F5EE"/>
+                </a:solidFill>
+                <a:latin typeface="Helvetica" pitchFamily="34" charset="0"/>
+                <a:ea typeface="Helvetica" pitchFamily="34" charset="-122"/>
+                <a:cs typeface="Helvetica" pitchFamily="34" charset="-120"/>
+              </a:rPr>
+              <a:t>CRM configurado con el embudo de Skin Clinic PR: desde nuevo contacto hasta cita atendida</a:t>
+            </a:r>
+            <a:endParaRPr lang="en-US" sz="1600" dirty="0"/>
+          </a:p>
+          <a:p>
+            <a:pPr marL="342900" indent="-342900">
+              <a:spcAft>
+                <a:spcPts val="800"/>
+              </a:spcAft>
+              <a:buSzPct val="100000"/>
+              <a:buChar char="●"/>
+            </a:pPr>
+            <a:r>
+              <a:rPr lang="en-US" sz="1600" dirty="0">
+                <a:solidFill>
+                  <a:srgbClr val="E9F5EE"/>
+                </a:solidFill>
+                <a:latin typeface="Helvetica" pitchFamily="34" charset="0"/>
+                <a:ea typeface="Helvetica" pitchFamily="34" charset="-122"/>
+                <a:cs typeface="Helvetica" pitchFamily="34" charset="-120"/>
+              </a:rPr>
+              <a:t>Confirmaciones automaticas de citas para reducir las que se caen</a:t>
+            </a:r>
+            <a:endParaRPr lang="en-US" sz="1600" dirty="0"/>
+          </a:p>
+        </p:txBody>
+      </p:sp>
+    </p:spTree>
+  </p:cSld>
+  <p:clrMapOvr>
+    <a:masterClrMapping/>
+  </p:clrMapOvr>
+</p:sld>
+</file>
+
+<file path=ppt/slides/slide8.xml><?xml version="1.0" encoding="utf-8"?>
+<p:sld xmlns:a="http://schemas.openxmlformats.org/drawingml/2006/main" xmlns:r="http://schemas.openxmlformats.org/officeDocument/2006/relationships" xmlns:p="http://schemas.openxmlformats.org/presentationml/2006/main">
+  <p:cSld name="Slide 8">
+    <p:bg>
+      <p:bgPr>
+        <a:solidFill>
+          <a:srgbClr val="07160F"/>
+        </a:solidFill>
+      </p:bgPr>
+    </p:bg>
+    <p:spTree>
+      <p:nvGrpSpPr>
+        <p:cNvPr id="1" name=""/>
+        <p:cNvGrpSpPr/>
+        <p:nvPr/>
+      </p:nvGrpSpPr>
+      <p:grpSpPr>
+        <a:xfrm>
+          <a:off x="0" y="0"/>
+          <a:ext cx="0" cy="0"/>
+          <a:chOff x="0" y="0"/>
+          <a:chExt cx="0" cy="0"/>
+        </a:xfrm>
+      </p:grpSpPr>
+      <p:sp>
+        <p:nvSpPr>
+          <p:cNvPr id="2" name="Text 0"/>
+          <p:cNvSpPr/>
+          <p:nvPr/>
+        </p:nvSpPr>
+        <p:spPr>
+          <a:xfrm>
+            <a:off x="365760" y="4754880"/>
+            <a:ext cx="4572000" cy="274320"/>
+          </a:xfrm>
+          <a:prstGeom prst="rect">
+            <a:avLst/>
+          </a:prstGeom>
+          <a:noFill/>
+          <a:ln/>
+        </p:spPr>
+        <p:txBody>
+          <a:bodyPr wrap="square" rtlCol="0" anchor="ctr"/>
+          <a:lstStyle/>
+          <a:p>
+            <a:pPr indent="0" marL="0">
+              <a:buNone/>
+            </a:pPr>
+            <a:r>
+              <a:rPr lang="en-US" sz="900" dirty="0">
+                <a:solidFill>
+                  <a:srgbClr val="9DB8AA"/>
+                </a:solidFill>
+                <a:latin typeface="Helvetica" pitchFamily="34" charset="0"/>
+                <a:ea typeface="Helvetica" pitchFamily="34" charset="-122"/>
+                <a:cs typeface="Helvetica" pitchFamily="34" charset="-120"/>
+              </a:rPr>
+              <a:t>AI Borinquen · AutoFlow · Puerto Rico</a:t>
+            </a:r>
+            <a:endParaRPr lang="en-US" sz="900" dirty="0"/>
+          </a:p>
+        </p:txBody>
+      </p:sp>
+      <p:sp>
+        <p:nvSpPr>
+          <p:cNvPr id="3" name="Text 1"/>
+          <p:cNvSpPr/>
+          <p:nvPr/>
+        </p:nvSpPr>
+        <p:spPr>
+          <a:xfrm>
+            <a:off x="5120640" y="4754880"/>
+            <a:ext cx="3657600" cy="274320"/>
+          </a:xfrm>
+          <a:prstGeom prst="rect">
+            <a:avLst/>
+          </a:prstGeom>
+          <a:noFill/>
+          <a:ln/>
+        </p:spPr>
+        <p:txBody>
+          <a:bodyPr wrap="square" rtlCol="0" anchor="ctr"/>
+          <a:lstStyle/>
+          <a:p>
+            <a:pPr algn="r" indent="0" marL="0">
+              <a:buNone/>
+            </a:pPr>
+            <a:r>
+              <a:rPr lang="en-US" sz="900" dirty="0">
+                <a:solidFill>
+                  <a:srgbClr val="9DB8AA"/>
+                </a:solidFill>
+                <a:latin typeface="Helvetica" pitchFamily="34" charset="0"/>
+                <a:ea typeface="Helvetica" pitchFamily="34" charset="-122"/>
+                <a:cs typeface="Helvetica" pitchFamily="34" charset="-120"/>
+              </a:rPr>
+              <a:t>Skin Clinic PR</a:t>
+            </a:r>
+            <a:endParaRPr lang="en-US" sz="900" dirty="0"/>
+          </a:p>
+        </p:txBody>
+      </p:sp>
+      <p:sp>
+        <p:nvSpPr>
+          <p:cNvPr id="4" name="Text 2"/>
+          <p:cNvSpPr/>
+          <p:nvPr/>
+        </p:nvSpPr>
+        <p:spPr>
+          <a:xfrm>
+            <a:off x="457200" y="320040"/>
+            <a:ext cx="8229600" cy="274320"/>
+          </a:xfrm>
+          <a:prstGeom prst="rect">
+            <a:avLst/>
+          </a:prstGeom>
+          <a:noFill/>
+          <a:ln/>
+        </p:spPr>
+        <p:txBody>
+          <a:bodyPr wrap="square" rtlCol="0" anchor="ctr"/>
+          <a:lstStyle/>
+          <a:p>
+            <a:pPr indent="0" marL="0">
+              <a:buNone/>
+            </a:pPr>
+            <a:r>
+              <a:rPr lang="en-US" sz="1000" b="1" spc="300" kern="0" dirty="0">
+                <a:solidFill>
+                  <a:srgbClr val="35C06F"/>
+                </a:solidFill>
+                <a:latin typeface="Helvetica" pitchFamily="34" charset="0"/>
+                <a:ea typeface="Helvetica" pitchFamily="34" charset="-122"/>
+                <a:cs typeface="Helvetica" pitchFamily="34" charset="-120"/>
+              </a:rPr>
+              <a:t>PRUÉBALO TÚ MISMO</a:t>
+            </a:r>
+            <a:endParaRPr lang="en-US" sz="1000" dirty="0"/>
+          </a:p>
+        </p:txBody>
+      </p:sp>
+      <p:sp>
+        <p:nvSpPr>
+          <p:cNvPr id="5" name="Text 3"/>
+          <p:cNvSpPr/>
+          <p:nvPr/>
+        </p:nvSpPr>
+        <p:spPr>
+          <a:xfrm>
+            <a:off x="457200" y="594360"/>
+            <a:ext cx="8229600" cy="731520"/>
+          </a:xfrm>
+          <a:prstGeom prst="rect">
+            <a:avLst/>
+          </a:prstGeom>
+          <a:noFill/>
+          <a:ln/>
+        </p:spPr>
+        <p:txBody>
+          <a:bodyPr wrap="square" rtlCol="0" anchor="ctr"/>
+          <a:lstStyle/>
+          <a:p>
+            <a:pPr indent="0" marL="0">
+              <a:buNone/>
+            </a:pPr>
+            <a:r>
+              <a:rPr lang="en-US" sz="2800" b="1" dirty="0">
+                <a:solidFill>
+                  <a:srgbClr val="E9F5EE"/>
+                </a:solidFill>
+                <a:latin typeface="Helvetica" pitchFamily="34" charset="0"/>
+                <a:ea typeface="Helvetica" pitchFamily="34" charset="-122"/>
+                <a:cs typeface="Helvetica" pitchFamily="34" charset="-120"/>
+              </a:rPr>
+              <a:t>Ya está construido para ti</a:t>
+            </a:r>
+            <a:endParaRPr lang="en-US" sz="2800" dirty="0"/>
+          </a:p>
+        </p:txBody>
+      </p:sp>
+      <p:sp>
+        <p:nvSpPr>
+          <p:cNvPr id="6" name="Shape 4"/>
+          <p:cNvSpPr/>
+          <p:nvPr/>
+        </p:nvSpPr>
+        <p:spPr>
+          <a:xfrm>
+            <a:off x="457200" y="1554480"/>
+            <a:ext cx="2651760" cy="2194560"/>
+          </a:xfrm>
+          <a:prstGeom prst="roundRect">
+            <a:avLst>
+              <a:gd name="adj" fmla="val 4167"/>
+            </a:avLst>
+          </a:prstGeom>
+          <a:solidFill>
+            <a:srgbClr val="0D2118"/>
+          </a:solidFill>
+          <a:ln w="12700">
+            <a:solidFill>
+              <a:srgbClr val="1F3A2B"/>
+            </a:solidFill>
+            <a:prstDash val="solid"/>
+          </a:ln>
+        </p:spPr>
+      </p:sp>
+      <p:sp>
+        <p:nvSpPr>
+          <p:cNvPr id="7" name="Text 5"/>
+          <p:cNvSpPr/>
+          <p:nvPr/>
+        </p:nvSpPr>
+        <p:spPr>
+          <a:xfrm>
+            <a:off x="640080" y="1691640"/>
+            <a:ext cx="2286000" cy="457200"/>
+          </a:xfrm>
+          <a:prstGeom prst="rect">
+            <a:avLst/>
+          </a:prstGeom>
+          <a:noFill/>
+          <a:ln/>
+        </p:spPr>
+        <p:txBody>
+          <a:bodyPr wrap="square" rtlCol="0" anchor="ctr"/>
+          <a:lstStyle/>
+          <a:p>
+            <a:pPr indent="0" marL="0">
+              <a:buNone/>
+            </a:pPr>
+            <a:r>
+              <a:rPr lang="en-US" sz="1800" b="1" dirty="0">
+                <a:solidFill>
+                  <a:srgbClr val="E9F5EE"/>
+                </a:solidFill>
+                <a:latin typeface="Helvetica" pitchFamily="34" charset="0"/>
+                <a:ea typeface="Helvetica" pitchFamily="34" charset="-122"/>
+                <a:cs typeface="Helvetica" pitchFamily="34" charset="-120"/>
+              </a:rPr>
+              <a:t>💬 Chat</a:t>
+            </a:r>
+            <a:endParaRPr lang="en-US" sz="1800" dirty="0"/>
+          </a:p>
+        </p:txBody>
+      </p:sp>
+      <p:sp>
+        <p:nvSpPr>
+          <p:cNvPr id="8" name="Text 6"/>
+          <p:cNvSpPr/>
+          <p:nvPr/>
+        </p:nvSpPr>
+        <p:spPr>
+          <a:xfrm>
+            <a:off x="640080" y="2148840"/>
+            <a:ext cx="2286000" cy="731520"/>
+          </a:xfrm>
+          <a:prstGeom prst="rect">
+            <a:avLst/>
+          </a:prstGeom>
+          <a:noFill/>
+          <a:ln/>
+        </p:spPr>
+        <p:txBody>
+          <a:bodyPr wrap="square" rtlCol="0" anchor="ctr"/>
+          <a:lstStyle/>
+          <a:p>
+            <a:pPr indent="0" marL="0">
+              <a:buNone/>
+            </a:pPr>
+            <a:r>
+              <a:rPr lang="en-US" sz="1200" dirty="0">
+                <a:solidFill>
+                  <a:srgbClr val="9DB8AA"/>
+                </a:solidFill>
+                <a:latin typeface="Helvetica" pitchFamily="34" charset="0"/>
+                <a:ea typeface="Helvetica" pitchFamily="34" charset="-122"/>
+                <a:cs typeface="Helvetica" pitchFamily="34" charset="-120"/>
+              </a:rPr>
+              <a:t>Escríbele a Nicole como cliente</a:t>
+            </a:r>
+            <a:endParaRPr lang="en-US" sz="1200" dirty="0"/>
+          </a:p>
+        </p:txBody>
+      </p:sp>
+      <p:sp>
+        <p:nvSpPr>
+          <p:cNvPr id="9" name="Text 7">
+            <a:hlinkClick r:id="rId1" tooltip=""/>
+          </p:cNvPr>
+          <p:cNvSpPr/>
+          <p:nvPr/>
+        </p:nvSpPr>
+        <p:spPr>
+          <a:xfrm>
+            <a:off x="640080" y="3017520"/>
+            <a:ext cx="2286000" cy="548640"/>
+          </a:xfrm>
+          <a:prstGeom prst="rect">
+            <a:avLst/>
+          </a:prstGeom>
+          <a:noFill/>
+          <a:ln/>
+        </p:spPr>
+        <p:txBody>
+          <a:bodyPr wrap="square" rtlCol="0" anchor="ctr"/>
+          <a:lstStyle/>
+          <a:p>
+            <a:pPr indent="0" marL="0">
+              <a:buNone/>
+            </a:pPr>
+            <a:r>
+              <a:rPr lang="en-US" sz="900" u="sng" dirty="0">
+                <a:solidFill>
+                  <a:srgbClr val="35C06F"/>
+                </a:solidFill>
+                <a:latin typeface="Helvetica" pitchFamily="34" charset="0"/>
+                <a:ea typeface="Helvetica" pitchFamily="34" charset="-122"/>
+                <a:cs typeface="Helvetica" pitchFamily="34" charset="-120"/>
+                <a:hlinkClick r:id="rId1" invalidUrl="" action="" tgtFrame="" tooltip="" history="1" highlightClick="0" endSnd="0">
+                  <a:extLst>
+                    <a:ext uri="{A12FA001-AC4F-418D-AE19-62706E023703}">
+                      <ahyp:hlinkClr xmlns:ahyp="http://schemas.microsoft.com/office/drawing/2018/hyperlinkcolor" val="tx"/>
+                    </a:ext>
+                  </a:extLst>
+                </a:hlinkClick>
+              </a:rPr>
+              <a:t>chat/</a:t>
+            </a:r>
+            <a:endParaRPr lang="en-US" sz="900" dirty="0"/>
+          </a:p>
+        </p:txBody>
+      </p:sp>
+      <p:sp>
+        <p:nvSpPr>
+          <p:cNvPr id="10" name="Shape 8"/>
+          <p:cNvSpPr/>
+          <p:nvPr/>
+        </p:nvSpPr>
+        <p:spPr>
+          <a:xfrm>
+            <a:off x="3291840" y="1554480"/>
+            <a:ext cx="2651760" cy="2194560"/>
+          </a:xfrm>
+          <a:prstGeom prst="roundRect">
+            <a:avLst>
+              <a:gd name="adj" fmla="val 4167"/>
+            </a:avLst>
+          </a:prstGeom>
+          <a:solidFill>
+            <a:srgbClr val="0D2118"/>
+          </a:solidFill>
+          <a:ln w="12700">
+            <a:solidFill>
+              <a:srgbClr val="1F3A2B"/>
+            </a:solidFill>
+            <a:prstDash val="solid"/>
+          </a:ln>
+        </p:spPr>
+      </p:sp>
+      <p:sp>
+        <p:nvSpPr>
+          <p:cNvPr id="11" name="Text 9"/>
+          <p:cNvSpPr/>
+          <p:nvPr/>
+        </p:nvSpPr>
+        <p:spPr>
+          <a:xfrm>
+            <a:off x="3474720" y="1691640"/>
+            <a:ext cx="2286000" cy="457200"/>
+          </a:xfrm>
+          <a:prstGeom prst="rect">
+            <a:avLst/>
+          </a:prstGeom>
+          <a:noFill/>
+          <a:ln/>
+        </p:spPr>
+        <p:txBody>
+          <a:bodyPr wrap="square" rtlCol="0" anchor="ctr"/>
+          <a:lstStyle/>
+          <a:p>
+            <a:pPr indent="0" marL="0">
+              <a:buNone/>
+            </a:pPr>
+            <a:r>
+              <a:rPr lang="en-US" sz="1800" b="1" dirty="0">
+                <a:solidFill>
+                  <a:srgbClr val="E9F5EE"/>
+                </a:solidFill>
+                <a:latin typeface="Helvetica" pitchFamily="34" charset="0"/>
+                <a:ea typeface="Helvetica" pitchFamily="34" charset="-122"/>
+                <a:cs typeface="Helvetica" pitchFamily="34" charset="-120"/>
+              </a:rPr>
+              <a:t>📞 Voz</a:t>
+            </a:r>
+            <a:endParaRPr lang="en-US" sz="1800" dirty="0"/>
+          </a:p>
+        </p:txBody>
+      </p:sp>
+      <p:sp>
+        <p:nvSpPr>
+          <p:cNvPr id="12" name="Text 10"/>
+          <p:cNvSpPr/>
+          <p:nvPr/>
+        </p:nvSpPr>
+        <p:spPr>
+          <a:xfrm>
+            <a:off x="3474720" y="2148840"/>
+            <a:ext cx="2286000" cy="731520"/>
+          </a:xfrm>
+          <a:prstGeom prst="rect">
+            <a:avLst/>
+          </a:prstGeom>
+          <a:noFill/>
+          <a:ln/>
+        </p:spPr>
+        <p:txBody>
+          <a:bodyPr wrap="square" rtlCol="0" anchor="ctr"/>
+          <a:lstStyle/>
+          <a:p>
+            <a:pPr indent="0" marL="0">
+              <a:buNone/>
+            </a:pPr>
+            <a:r>
+              <a:rPr lang="en-US" sz="1200" dirty="0">
+                <a:solidFill>
+                  <a:srgbClr val="9DB8AA"/>
+                </a:solidFill>
+                <a:latin typeface="Helvetica" pitchFamily="34" charset="0"/>
+                <a:ea typeface="Helvetica" pitchFamily="34" charset="-122"/>
+                <a:cs typeface="Helvetica" pitchFamily="34" charset="-120"/>
+              </a:rPr>
+              <a:t>Habla con Nicole</a:t>
+            </a:r>
+            <a:endParaRPr lang="en-US" sz="1200" dirty="0"/>
+          </a:p>
+        </p:txBody>
+      </p:sp>
+      <p:sp>
+        <p:nvSpPr>
+          <p:cNvPr id="13" name="Text 11">
+            <a:hlinkClick r:id="rId2" tooltip=""/>
+          </p:cNvPr>
+          <p:cNvSpPr/>
+          <p:nvPr/>
+        </p:nvSpPr>
+        <p:spPr>
+          <a:xfrm>
+            <a:off x="3474720" y="3017520"/>
+            <a:ext cx="2286000" cy="548640"/>
+          </a:xfrm>
+          <a:prstGeom prst="rect">
+            <a:avLst/>
+          </a:prstGeom>
+          <a:noFill/>
+          <a:ln/>
+        </p:spPr>
+        <p:txBody>
+          <a:bodyPr wrap="square" rtlCol="0" anchor="ctr"/>
+          <a:lstStyle/>
+          <a:p>
+            <a:pPr indent="0" marL="0">
+              <a:buNone/>
+            </a:pPr>
+            <a:r>
+              <a:rPr lang="en-US" sz="900" u="sng" dirty="0">
+                <a:solidFill>
+                  <a:srgbClr val="35C06F"/>
+                </a:solidFill>
+                <a:latin typeface="Helvetica" pitchFamily="34" charset="0"/>
+                <a:ea typeface="Helvetica" pitchFamily="34" charset="-122"/>
+                <a:cs typeface="Helvetica" pitchFamily="34" charset="-120"/>
+                <a:hlinkClick r:id="rId2" invalidUrl="" action="" tgtFrame="" tooltip="" history="1" highlightClick="0" endSnd="0">
+                  <a:extLst>
+                    <a:ext uri="{A12FA001-AC4F-418D-AE19-62706E023703}">
+                      <ahyp:hlinkClr xmlns:ahyp="http://schemas.microsoft.com/office/drawing/2018/hyperlinkcolor" val="tx"/>
+                    </a:ext>
+                  </a:extLst>
+                </a:hlinkClick>
+              </a:rPr>
+              <a:t>voz/</a:t>
+            </a:r>
+            <a:endParaRPr lang="en-US" sz="900" dirty="0"/>
+          </a:p>
+        </p:txBody>
+      </p:sp>
+      <p:sp>
+        <p:nvSpPr>
+          <p:cNvPr id="14" name="Shape 12"/>
+          <p:cNvSpPr/>
+          <p:nvPr/>
+        </p:nvSpPr>
+        <p:spPr>
+          <a:xfrm>
+            <a:off x="6126480" y="1554480"/>
+            <a:ext cx="2651760" cy="2194560"/>
+          </a:xfrm>
+          <a:prstGeom prst="roundRect">
+            <a:avLst>
+              <a:gd name="adj" fmla="val 4167"/>
+            </a:avLst>
+          </a:prstGeom>
+          <a:solidFill>
+            <a:srgbClr val="0D2118"/>
+          </a:solidFill>
+          <a:ln w="12700">
+            <a:solidFill>
+              <a:srgbClr val="1F3A2B"/>
+            </a:solidFill>
+            <a:prstDash val="solid"/>
+          </a:ln>
+        </p:spPr>
+      </p:sp>
+      <p:sp>
+        <p:nvSpPr>
+          <p:cNvPr id="15" name="Text 13"/>
+          <p:cNvSpPr/>
+          <p:nvPr/>
+        </p:nvSpPr>
+        <p:spPr>
+          <a:xfrm>
+            <a:off x="6309360" y="1691640"/>
+            <a:ext cx="2286000" cy="457200"/>
+          </a:xfrm>
+          <a:prstGeom prst="rect">
+            <a:avLst/>
+          </a:prstGeom>
+          <a:noFill/>
+          <a:ln/>
+        </p:spPr>
+        <p:txBody>
+          <a:bodyPr wrap="square" rtlCol="0" anchor="ctr"/>
+          <a:lstStyle/>
+          <a:p>
+            <a:pPr indent="0" marL="0">
+              <a:buNone/>
+            </a:pPr>
+            <a:r>
+              <a:rPr lang="en-US" sz="1800" b="1" dirty="0">
+                <a:solidFill>
+                  <a:srgbClr val="E9F5EE"/>
+                </a:solidFill>
+                <a:latin typeface="Helvetica" pitchFamily="34" charset="0"/>
+                <a:ea typeface="Helvetica" pitchFamily="34" charset="-122"/>
+                <a:cs typeface="Helvetica" pitchFamily="34" charset="-120"/>
+              </a:rPr>
+              <a:t>🖥️ Tu portal</a:t>
+            </a:r>
+            <a:endParaRPr lang="en-US" sz="1800" dirty="0"/>
+          </a:p>
+        </p:txBody>
+      </p:sp>
+      <p:sp>
+        <p:nvSpPr>
+          <p:cNvPr id="16" name="Text 14"/>
+          <p:cNvSpPr/>
+          <p:nvPr/>
+        </p:nvSpPr>
+        <p:spPr>
+          <a:xfrm>
+            <a:off x="6309360" y="2148840"/>
+            <a:ext cx="2286000" cy="731520"/>
+          </a:xfrm>
+          <a:prstGeom prst="rect">
+            <a:avLst/>
+          </a:prstGeom>
+          <a:noFill/>
+          <a:ln/>
+        </p:spPr>
+        <p:txBody>
+          <a:bodyPr wrap="square" rtlCol="0" anchor="ctr"/>
+          <a:lstStyle/>
+          <a:p>
+            <a:pPr indent="0" marL="0">
+              <a:buNone/>
+            </a:pPr>
+            <a:r>
+              <a:rPr lang="en-US" sz="1200" dirty="0">
+                <a:solidFill>
+                  <a:srgbClr val="9DB8AA"/>
+                </a:solidFill>
+                <a:latin typeface="Helvetica" pitchFamily="34" charset="0"/>
+                <a:ea typeface="Helvetica" pitchFamily="34" charset="-122"/>
+                <a:cs typeface="Helvetica" pitchFamily="34" charset="-120"/>
+              </a:rPr>
+              <a:t>Agentes, llamadas y CRM en vivo</a:t>
+            </a:r>
+            <a:endParaRPr lang="en-US" sz="1200" dirty="0"/>
+          </a:p>
+        </p:txBody>
+      </p:sp>
+      <p:sp>
+        <p:nvSpPr>
+          <p:cNvPr id="17" name="Text 15">
+            <a:hlinkClick r:id="rId3" tooltip=""/>
+          </p:cNvPr>
+          <p:cNvSpPr/>
+          <p:nvPr/>
+        </p:nvSpPr>
+        <p:spPr>
+          <a:xfrm>
+            <a:off x="6309360" y="3017520"/>
+            <a:ext cx="2286000" cy="548640"/>
+          </a:xfrm>
+          <a:prstGeom prst="rect">
+            <a:avLst/>
+          </a:prstGeom>
+          <a:noFill/>
+          <a:ln/>
+        </p:spPr>
+        <p:txBody>
+          <a:bodyPr wrap="square" rtlCol="0" anchor="ctr"/>
+          <a:lstStyle/>
+          <a:p>
+            <a:pPr indent="0" marL="0">
+              <a:buNone/>
+            </a:pPr>
+            <a:r>
+              <a:rPr lang="en-US" sz="900" u="sng" dirty="0">
+                <a:solidFill>
+                  <a:srgbClr val="35C06F"/>
+                </a:solidFill>
+                <a:latin typeface="Helvetica" pitchFamily="34" charset="0"/>
+                <a:ea typeface="Helvetica" pitchFamily="34" charset="-122"/>
+                <a:cs typeface="Helvetica" pitchFamily="34" charset="-120"/>
+                <a:hlinkClick r:id="rId3" invalidUrl="" action="" tgtFrame="" tooltip="" history="1" highlightClick="0" endSnd="0">
+                  <a:extLst>
+                    <a:ext uri="{A12FA001-AC4F-418D-AE19-62706E023703}">
+                      <ahyp:hlinkClr xmlns:ahyp="http://schemas.microsoft.com/office/drawing/2018/hyperlinkcolor" val="tx"/>
+                    </a:ext>
+                  </a:extLst>
+                </a:hlinkClick>
+              </a:rPr>
+              <a:t>https://content-os-chi-seven.vercel.app/portal/skin-clinic-pr?k=850528a55e0b4c9dd9f068942354d57b</a:t>
+            </a:r>
+            <a:endParaRPr lang="en-US" sz="900" dirty="0"/>
+          </a:p>
+        </p:txBody>
+      </p:sp>
+    </p:spTree>
+  </p:cSld>
+  <p:clrMapOvr>
+    <a:masterClrMapping/>
+  </p:clrMapOvr>
+</p:sld>
+</file>
+
+<file path=ppt/slides/slide9.xml><?xml version="1.0" encoding="utf-8"?>
+<p:sld xmlns:a="http://schemas.openxmlformats.org/drawingml/2006/main" xmlns:r="http://schemas.openxmlformats.org/officeDocument/2006/relationships" xmlns:p="http://schemas.openxmlformats.org/presentationml/2006/main">
+  <p:cSld name="Slide 9">
+    <p:bg>
+      <p:bgPr>
+        <a:solidFill>
+          <a:srgbClr val="07160F"/>
+        </a:solidFill>
+      </p:bgPr>
+    </p:bg>
+    <p:spTree>
+      <p:nvGrpSpPr>
+        <p:cNvPr id="1" name=""/>
+        <p:cNvGrpSpPr/>
+        <p:nvPr/>
+      </p:nvGrpSpPr>
+      <p:grpSpPr>
+        <a:xfrm>
+          <a:off x="0" y="0"/>
+          <a:ext cx="0" cy="0"/>
+          <a:chOff x="0" y="0"/>
+          <a:chExt cx="0" cy="0"/>
+        </a:xfrm>
+      </p:grpSpPr>
+      <p:sp>
+        <p:nvSpPr>
+          <p:cNvPr id="2" name="Text 0"/>
+          <p:cNvSpPr/>
+          <p:nvPr/>
+        </p:nvSpPr>
+        <p:spPr>
+          <a:xfrm>
+            <a:off x="365760" y="4754880"/>
+            <a:ext cx="4572000" cy="274320"/>
+          </a:xfrm>
+          <a:prstGeom prst="rect">
+            <a:avLst/>
+          </a:prstGeom>
+          <a:noFill/>
+          <a:ln/>
+        </p:spPr>
+        <p:txBody>
+          <a:bodyPr wrap="square" rtlCol="0" anchor="ctr"/>
+          <a:lstStyle/>
+          <a:p>
+            <a:pPr indent="0" marL="0">
+              <a:buNone/>
+            </a:pPr>
+            <a:r>
+              <a:rPr lang="en-US" sz="900" dirty="0">
+                <a:solidFill>
+                  <a:srgbClr val="9DB8AA"/>
+                </a:solidFill>
+                <a:latin typeface="Helvetica" pitchFamily="34" charset="0"/>
+                <a:ea typeface="Helvetica" pitchFamily="34" charset="-122"/>
+                <a:cs typeface="Helvetica" pitchFamily="34" charset="-120"/>
+              </a:rPr>
+              <a:t>AI Borinquen · AutoFlow · Puerto Rico</a:t>
+            </a:r>
+            <a:endParaRPr lang="en-US" sz="900" dirty="0"/>
+          </a:p>
+        </p:txBody>
+      </p:sp>
+      <p:sp>
+        <p:nvSpPr>
+          <p:cNvPr id="3" name="Text 1"/>
+          <p:cNvSpPr/>
+          <p:nvPr/>
+        </p:nvSpPr>
+        <p:spPr>
+          <a:xfrm>
+            <a:off x="5120640" y="4754880"/>
+            <a:ext cx="3657600" cy="274320"/>
+          </a:xfrm>
+          <a:prstGeom prst="rect">
+            <a:avLst/>
+          </a:prstGeom>
+          <a:noFill/>
+          <a:ln/>
+        </p:spPr>
+        <p:txBody>
+          <a:bodyPr wrap="square" rtlCol="0" anchor="ctr"/>
+          <a:lstStyle/>
+          <a:p>
+            <a:pPr algn="r" indent="0" marL="0">
+              <a:buNone/>
+            </a:pPr>
+            <a:r>
+              <a:rPr lang="en-US" sz="900" dirty="0">
+                <a:solidFill>
+                  <a:srgbClr val="9DB8AA"/>
+                </a:solidFill>
+                <a:latin typeface="Helvetica" pitchFamily="34" charset="0"/>
+                <a:ea typeface="Helvetica" pitchFamily="34" charset="-122"/>
+                <a:cs typeface="Helvetica" pitchFamily="34" charset="-120"/>
+              </a:rPr>
+              <a:t>Skin Clinic PR</a:t>
+            </a:r>
+            <a:endParaRPr lang="en-US" sz="900" dirty="0"/>
+          </a:p>
+        </p:txBody>
+      </p:sp>
+      <p:sp>
+        <p:nvSpPr>
+          <p:cNvPr id="4" name="Text 2"/>
+          <p:cNvSpPr/>
+          <p:nvPr/>
+        </p:nvSpPr>
+        <p:spPr>
+          <a:xfrm>
+            <a:off x="457200" y="320040"/>
+            <a:ext cx="8229600" cy="274320"/>
+          </a:xfrm>
+          <a:prstGeom prst="rect">
+            <a:avLst/>
+          </a:prstGeom>
+          <a:noFill/>
+          <a:ln/>
+        </p:spPr>
+        <p:txBody>
+          <a:bodyPr wrap="square" rtlCol="0" anchor="ctr"/>
+          <a:lstStyle/>
+          <a:p>
+            <a:pPr indent="0" marL="0">
+              <a:buNone/>
+            </a:pPr>
+            <a:r>
+              <a:rPr lang="en-US" sz="1000" b="1" spc="300" kern="0" dirty="0">
+                <a:solidFill>
+                  <a:srgbClr val="35C06F"/>
+                </a:solidFill>
+                <a:latin typeface="Helvetica" pitchFamily="34" charset="0"/>
+                <a:ea typeface="Helvetica" pitchFamily="34" charset="-122"/>
+                <a:cs typeface="Helvetica" pitchFamily="34" charset="-120"/>
+              </a:rPr>
+              <a:t>LA CUENTA QUE NADIE TE HACE</a:t>
+            </a:r>
+            <a:endParaRPr lang="en-US" sz="1000" dirty="0"/>
+          </a:p>
+        </p:txBody>
+      </p:sp>
+      <p:sp>
+        <p:nvSpPr>
+          <p:cNvPr id="5" name="Text 3"/>
+          <p:cNvSpPr/>
+          <p:nvPr/>
+        </p:nvSpPr>
+        <p:spPr>
+          <a:xfrm>
+            <a:off x="457200" y="594360"/>
+            <a:ext cx="8229600" cy="731520"/>
+          </a:xfrm>
+          <a:prstGeom prst="rect">
+            <a:avLst/>
+          </a:prstGeom>
+          <a:noFill/>
+          <a:ln/>
+        </p:spPr>
+        <p:txBody>
+          <a:bodyPr wrap="square" rtlCol="0" anchor="ctr"/>
+          <a:lstStyle/>
+          <a:p>
+            <a:pPr indent="0" marL="0">
+              <a:buNone/>
+            </a:pPr>
+            <a:r>
+              <a:rPr lang="en-US" sz="2800" b="1" dirty="0">
+                <a:solidFill>
+                  <a:srgbClr val="E9F5EE"/>
+                </a:solidFill>
+                <a:latin typeface="Helvetica" pitchFamily="34" charset="0"/>
+                <a:ea typeface="Helvetica" pitchFamily="34" charset="-122"/>
+                <a:cs typeface="Helvetica" pitchFamily="34" charset="-120"/>
+              </a:rPr>
               <a:t>Empleado 24/7 vs AutoFlow</a:t>
             </a:r>
             <a:endParaRPr lang="en-US" sz="2800" dirty="0"/>
@@ -3603,7 +6317,7 @@
       </p:sp>
       <p:graphicFrame>
         <p:nvGraphicFramePr>
-          <p:cNvPr id="7" name="Table 0"/>
+          <p:cNvPr id="10" name="Table 0"/>
           <p:cNvGraphicFramePr>
             <a:graphicFrameLocks noGrp="1"/>
           </p:cNvGraphicFramePr>
@@ -4389,7 +7103,7 @@
                           <a:ea typeface="Helvetica" pitchFamily="34" charset="-122"/>
                           <a:cs typeface="Helvetica" pitchFamily="34" charset="-120"/>
                         </a:rPr>
-                        <a:t>~10 segundos</a:t>
+                        <a:t>segundos</a:t>
                       </a:r>
                       <a:endParaRPr lang="en-US" sz="1400" dirty="0">
                         <a:latin typeface="Helvetica" charset="0"/>
@@ -4651,1245 +7365,6 @@
           </a:graphicData>
         </a:graphic>
       </p:graphicFrame>
-    </p:spTree>
-  </p:cSld>
-  <p:clrMapOvr>
-    <a:masterClrMapping/>
-  </p:clrMapOvr>
-</p:sld>
-</file>
-
-<file path=ppt/slides/slide7.xml><?xml version="1.0" encoding="utf-8"?>
-<p:sld xmlns:a="http://schemas.openxmlformats.org/drawingml/2006/main" xmlns:r="http://schemas.openxmlformats.org/officeDocument/2006/relationships" xmlns:p="http://schemas.openxmlformats.org/presentationml/2006/main">
-  <p:cSld name="Slide 7">
-    <p:bg>
-      <p:bgPr>
-        <a:solidFill>
-          <a:srgbClr val="07160F"/>
-        </a:solidFill>
-      </p:bgPr>
-    </p:bg>
-    <p:spTree>
-      <p:nvGrpSpPr>
-        <p:cNvPr id="1" name=""/>
-        <p:cNvGrpSpPr/>
-        <p:nvPr/>
-      </p:nvGrpSpPr>
-      <p:grpSpPr>
-        <a:xfrm>
-          <a:off x="0" y="0"/>
-          <a:ext cx="0" cy="0"/>
-          <a:chOff x="0" y="0"/>
-          <a:chExt cx="0" cy="0"/>
-        </a:xfrm>
-      </p:grpSpPr>
-      <p:sp>
-        <p:nvSpPr>
-          <p:cNvPr id="2" name="Text 0"/>
-          <p:cNvSpPr/>
-          <p:nvPr/>
-        </p:nvSpPr>
-        <p:spPr>
-          <a:xfrm>
-            <a:off x="365760" y="4754880"/>
-            <a:ext cx="3657600" cy="274320"/>
-          </a:xfrm>
-          <a:prstGeom prst="rect">
-            <a:avLst/>
-          </a:prstGeom>
-          <a:noFill/>
-          <a:ln/>
-        </p:spPr>
-        <p:txBody>
-          <a:bodyPr wrap="square" rtlCol="0" anchor="ctr"/>
-          <a:lstStyle/>
-          <a:p>
-            <a:pPr indent="0" marL="0">
-              <a:buNone/>
-            </a:pPr>
-            <a:r>
-              <a:rPr lang="en-US" sz="900" dirty="0">
-                <a:solidFill>
-                  <a:srgbClr val="9DB8AA"/>
-                </a:solidFill>
-                <a:latin typeface="Helvetica" pitchFamily="34" charset="0"/>
-                <a:ea typeface="Helvetica" pitchFamily="34" charset="-122"/>
-                <a:cs typeface="Helvetica" pitchFamily="34" charset="-120"/>
-              </a:rPr>
-              <a:t>AI Borinquen · AutoFlow</a:t>
-            </a:r>
-            <a:endParaRPr lang="en-US" sz="900" dirty="0"/>
-          </a:p>
-        </p:txBody>
-      </p:sp>
-      <p:sp>
-        <p:nvSpPr>
-          <p:cNvPr id="3" name="Text 1"/>
-          <p:cNvSpPr/>
-          <p:nvPr/>
-        </p:nvSpPr>
-        <p:spPr>
-          <a:xfrm>
-            <a:off x="5120640" y="4754880"/>
-            <a:ext cx="3657600" cy="274320"/>
-          </a:xfrm>
-          <a:prstGeom prst="rect">
-            <a:avLst/>
-          </a:prstGeom>
-          <a:noFill/>
-          <a:ln/>
-        </p:spPr>
-        <p:txBody>
-          <a:bodyPr wrap="square" rtlCol="0" anchor="ctr"/>
-          <a:lstStyle/>
-          <a:p>
-            <a:pPr algn="r" indent="0" marL="0">
-              <a:buNone/>
-            </a:pPr>
-            <a:r>
-              <a:rPr lang="en-US" sz="900" dirty="0">
-                <a:solidFill>
-                  <a:srgbClr val="9DB8AA"/>
-                </a:solidFill>
-                <a:latin typeface="Helvetica" pitchFamily="34" charset="0"/>
-                <a:ea typeface="Helvetica" pitchFamily="34" charset="-122"/>
-                <a:cs typeface="Helvetica" pitchFamily="34" charset="-120"/>
-              </a:rPr>
-              <a:t>Skin Clinic PR</a:t>
-            </a:r>
-            <a:endParaRPr lang="en-US" sz="900" dirty="0"/>
-          </a:p>
-        </p:txBody>
-      </p:sp>
-      <p:sp>
-        <p:nvSpPr>
-          <p:cNvPr id="4" name="Text 2"/>
-          <p:cNvSpPr/>
-          <p:nvPr/>
-        </p:nvSpPr>
-        <p:spPr>
-          <a:xfrm>
-            <a:off x="457200" y="320040"/>
-            <a:ext cx="8229600" cy="274320"/>
-          </a:xfrm>
-          <a:prstGeom prst="rect">
-            <a:avLst/>
-          </a:prstGeom>
-          <a:noFill/>
-          <a:ln/>
-        </p:spPr>
-        <p:txBody>
-          <a:bodyPr wrap="square" rtlCol="0" anchor="ctr"/>
-          <a:lstStyle/>
-          <a:p>
-            <a:pPr indent="0" marL="0">
-              <a:buNone/>
-            </a:pPr>
-            <a:r>
-              <a:rPr lang="en-US" sz="1000" b="1" spc="300" kern="0" dirty="0">
-                <a:solidFill>
-                  <a:srgbClr val="35C06F"/>
-                </a:solidFill>
-                <a:latin typeface="Helvetica" pitchFamily="34" charset="0"/>
-                <a:ea typeface="Helvetica" pitchFamily="34" charset="-122"/>
-                <a:cs typeface="Helvetica" pitchFamily="34" charset="-120"/>
-              </a:rPr>
-              <a:t>LOS 3 NIVELES</a:t>
-            </a:r>
-            <a:endParaRPr lang="en-US" sz="1000" dirty="0"/>
-          </a:p>
-        </p:txBody>
-      </p:sp>
-      <p:sp>
-        <p:nvSpPr>
-          <p:cNvPr id="5" name="Text 3"/>
-          <p:cNvSpPr/>
-          <p:nvPr/>
-        </p:nvSpPr>
-        <p:spPr>
-          <a:xfrm>
-            <a:off x="457200" y="594360"/>
-            <a:ext cx="8229600" cy="731520"/>
-          </a:xfrm>
-          <a:prstGeom prst="rect">
-            <a:avLst/>
-          </a:prstGeom>
-          <a:noFill/>
-          <a:ln/>
-        </p:spPr>
-        <p:txBody>
-          <a:bodyPr wrap="square" rtlCol="0" anchor="ctr"/>
-          <a:lstStyle/>
-          <a:p>
-            <a:pPr indent="0" marL="0">
-              <a:buNone/>
-            </a:pPr>
-            <a:r>
-              <a:rPr lang="en-US" sz="2800" b="1" dirty="0">
-                <a:solidFill>
-                  <a:srgbClr val="E9F5EE"/>
-                </a:solidFill>
-                <a:latin typeface="Helvetica" pitchFamily="34" charset="0"/>
-                <a:ea typeface="Helvetica" pitchFamily="34" charset="-122"/>
-                <a:cs typeface="Helvetica" pitchFamily="34" charset="-120"/>
-              </a:rPr>
-              <a:t>Para que compares bien</a:t>
-            </a:r>
-            <a:endParaRPr lang="en-US" sz="2800" dirty="0"/>
-          </a:p>
-        </p:txBody>
-      </p:sp>
-      <p:sp>
-        <p:nvSpPr>
-          <p:cNvPr id="6" name="Shape 4"/>
-          <p:cNvSpPr/>
-          <p:nvPr/>
-        </p:nvSpPr>
-        <p:spPr>
-          <a:xfrm>
-            <a:off x="457200" y="1463040"/>
-            <a:ext cx="2651760" cy="2743200"/>
-          </a:xfrm>
-          <a:prstGeom prst="roundRect">
-            <a:avLst>
-              <a:gd name="adj" fmla="val 3448"/>
-            </a:avLst>
-          </a:prstGeom>
-          <a:solidFill>
-            <a:srgbClr val="0D2118"/>
-          </a:solidFill>
-          <a:ln w="12700">
-            <a:solidFill>
-              <a:srgbClr val="1F3A2B"/>
-            </a:solidFill>
-            <a:prstDash val="solid"/>
-          </a:ln>
-        </p:spPr>
-      </p:sp>
-      <p:sp>
-        <p:nvSpPr>
-          <p:cNvPr id="7" name="Text 5"/>
-          <p:cNvSpPr/>
-          <p:nvPr/>
-        </p:nvSpPr>
-        <p:spPr>
-          <a:xfrm>
-            <a:off x="640080" y="1783080"/>
-            <a:ext cx="2286000" cy="548640"/>
-          </a:xfrm>
-          <a:prstGeom prst="rect">
-            <a:avLst/>
-          </a:prstGeom>
-          <a:noFill/>
-          <a:ln/>
-        </p:spPr>
-        <p:txBody>
-          <a:bodyPr wrap="square" rtlCol="0" anchor="ctr"/>
-          <a:lstStyle/>
-          <a:p>
-            <a:pPr indent="0" marL="0">
-              <a:buNone/>
-            </a:pPr>
-            <a:r>
-              <a:rPr lang="en-US" sz="1500" b="1" dirty="0">
-                <a:solidFill>
-                  <a:srgbClr val="E9F5EE"/>
-                </a:solidFill>
-                <a:latin typeface="Helvetica" pitchFamily="34" charset="0"/>
-                <a:ea typeface="Helvetica" pitchFamily="34" charset="-122"/>
-                <a:cs typeface="Helvetica" pitchFamily="34" charset="-120"/>
-              </a:rPr>
-              <a:t>Botones y reglas</a:t>
-            </a:r>
-            <a:endParaRPr lang="en-US" sz="1500" dirty="0"/>
-          </a:p>
-        </p:txBody>
-      </p:sp>
-      <p:sp>
-        <p:nvSpPr>
-          <p:cNvPr id="8" name="Text 6"/>
-          <p:cNvSpPr/>
-          <p:nvPr/>
-        </p:nvSpPr>
-        <p:spPr>
-          <a:xfrm>
-            <a:off x="640080" y="2331720"/>
-            <a:ext cx="2286000" cy="365760"/>
-          </a:xfrm>
-          <a:prstGeom prst="rect">
-            <a:avLst/>
-          </a:prstGeom>
-          <a:noFill/>
-          <a:ln/>
-        </p:spPr>
-        <p:txBody>
-          <a:bodyPr wrap="square" rtlCol="0" anchor="ctr"/>
-          <a:lstStyle/>
-          <a:p>
-            <a:pPr indent="0" marL="0">
-              <a:buNone/>
-            </a:pPr>
-            <a:r>
-              <a:rPr lang="en-US" sz="1400" b="1" dirty="0">
-                <a:solidFill>
-                  <a:srgbClr val="9DB8AA"/>
-                </a:solidFill>
-                <a:latin typeface="Helvetica" pitchFamily="34" charset="0"/>
-                <a:ea typeface="Helvetica" pitchFamily="34" charset="-122"/>
-                <a:cs typeface="Helvetica" pitchFamily="34" charset="-120"/>
-              </a:rPr>
-              <a:t>No lo vendemos</a:t>
-            </a:r>
-            <a:endParaRPr lang="en-US" sz="1400" dirty="0"/>
-          </a:p>
-        </p:txBody>
-      </p:sp>
-      <p:sp>
-        <p:nvSpPr>
-          <p:cNvPr id="9" name="Text 7"/>
-          <p:cNvSpPr/>
-          <p:nvPr/>
-        </p:nvSpPr>
-        <p:spPr>
-          <a:xfrm>
-            <a:off x="640080" y="2743200"/>
-            <a:ext cx="2286000" cy="1280160"/>
-          </a:xfrm>
-          <a:prstGeom prst="rect">
-            <a:avLst/>
-          </a:prstGeom>
-          <a:noFill/>
-          <a:ln/>
-        </p:spPr>
-        <p:txBody>
-          <a:bodyPr wrap="square" rtlCol="0" anchor="t"/>
-          <a:lstStyle/>
-          <a:p>
-            <a:pPr indent="0" marL="0">
-              <a:buNone/>
-            </a:pPr>
-            <a:r>
-              <a:rPr lang="en-US" sz="1100" dirty="0">
-                <a:solidFill>
-                  <a:srgbClr val="9DB8AA"/>
-                </a:solidFill>
-                <a:latin typeface="Helvetica" pitchFamily="34" charset="0"/>
-                <a:ea typeface="Helvetica" pitchFamily="34" charset="-122"/>
-                <a:cs typeface="Helvetica" pitchFamily="34" charset="-120"/>
-              </a:rPr>
-              <a:t>Menús fijos. Se rompe cuando el cliente escribe distinto.</a:t>
-            </a:r>
-            <a:endParaRPr lang="en-US" sz="1100" dirty="0"/>
-          </a:p>
-        </p:txBody>
-      </p:sp>
-      <p:sp>
-        <p:nvSpPr>
-          <p:cNvPr id="10" name="Shape 8"/>
-          <p:cNvSpPr/>
-          <p:nvPr/>
-        </p:nvSpPr>
-        <p:spPr>
-          <a:xfrm>
-            <a:off x="3291840" y="1463040"/>
-            <a:ext cx="2651760" cy="2743200"/>
-          </a:xfrm>
-          <a:prstGeom prst="roundRect">
-            <a:avLst>
-              <a:gd name="adj" fmla="val 3448"/>
-            </a:avLst>
-          </a:prstGeom>
-          <a:solidFill>
-            <a:srgbClr val="0D2118"/>
-          </a:solidFill>
-          <a:ln w="12700">
-            <a:solidFill>
-              <a:srgbClr val="1F3A2B"/>
-            </a:solidFill>
-            <a:prstDash val="solid"/>
-          </a:ln>
-        </p:spPr>
-      </p:sp>
-      <p:sp>
-        <p:nvSpPr>
-          <p:cNvPr id="11" name="Text 9"/>
-          <p:cNvSpPr/>
-          <p:nvPr/>
-        </p:nvSpPr>
-        <p:spPr>
-          <a:xfrm>
-            <a:off x="3474720" y="1783080"/>
-            <a:ext cx="2286000" cy="548640"/>
-          </a:xfrm>
-          <a:prstGeom prst="rect">
-            <a:avLst/>
-          </a:prstGeom>
-          <a:noFill/>
-          <a:ln/>
-        </p:spPr>
-        <p:txBody>
-          <a:bodyPr wrap="square" rtlCol="0" anchor="ctr"/>
-          <a:lstStyle/>
-          <a:p>
-            <a:pPr indent="0" marL="0">
-              <a:buNone/>
-            </a:pPr>
-            <a:r>
-              <a:rPr lang="en-US" sz="1500" b="1" dirty="0">
-                <a:solidFill>
-                  <a:srgbClr val="E9F5EE"/>
-                </a:solidFill>
-                <a:latin typeface="Helvetica" pitchFamily="34" charset="0"/>
-                <a:ea typeface="Helvetica" pitchFamily="34" charset="-122"/>
-                <a:cs typeface="Helvetica" pitchFamily="34" charset="-120"/>
-              </a:rPr>
-              <a:t>Chatbot con IA</a:t>
-            </a:r>
-            <a:endParaRPr lang="en-US" sz="1500" dirty="0"/>
-          </a:p>
-        </p:txBody>
-      </p:sp>
-      <p:sp>
-        <p:nvSpPr>
-          <p:cNvPr id="12" name="Text 10"/>
-          <p:cNvSpPr/>
-          <p:nvPr/>
-        </p:nvSpPr>
-        <p:spPr>
-          <a:xfrm>
-            <a:off x="3474720" y="2331720"/>
-            <a:ext cx="2286000" cy="365760"/>
-          </a:xfrm>
-          <a:prstGeom prst="rect">
-            <a:avLst/>
-          </a:prstGeom>
-          <a:noFill/>
-          <a:ln/>
-        </p:spPr>
-        <p:txBody>
-          <a:bodyPr wrap="square" rtlCol="0" anchor="ctr"/>
-          <a:lstStyle/>
-          <a:p>
-            <a:pPr indent="0" marL="0">
-              <a:buNone/>
-            </a:pPr>
-            <a:r>
-              <a:rPr lang="en-US" sz="1400" b="1" dirty="0">
-                <a:solidFill>
-                  <a:srgbClr val="9DB8AA"/>
-                </a:solidFill>
-                <a:latin typeface="Helvetica" pitchFamily="34" charset="0"/>
-                <a:ea typeface="Helvetica" pitchFamily="34" charset="-122"/>
-                <a:cs typeface="Helvetica" pitchFamily="34" charset="-120"/>
-              </a:rPr>
-              <a:t>$800–1,000 único</a:t>
-            </a:r>
-            <a:endParaRPr lang="en-US" sz="1400" dirty="0"/>
-          </a:p>
-        </p:txBody>
-      </p:sp>
-      <p:sp>
-        <p:nvSpPr>
-          <p:cNvPr id="13" name="Text 11"/>
-          <p:cNvSpPr/>
-          <p:nvPr/>
-        </p:nvSpPr>
-        <p:spPr>
-          <a:xfrm>
-            <a:off x="3474720" y="2743200"/>
-            <a:ext cx="2286000" cy="1280160"/>
-          </a:xfrm>
-          <a:prstGeom prst="rect">
-            <a:avLst/>
-          </a:prstGeom>
-          <a:noFill/>
-          <a:ln/>
-        </p:spPr>
-        <p:txBody>
-          <a:bodyPr wrap="square" rtlCol="0" anchor="t"/>
-          <a:lstStyle/>
-          <a:p>
-            <a:pPr indent="0" marL="0">
-              <a:buNone/>
-            </a:pPr>
-            <a:r>
-              <a:rPr lang="en-US" sz="1100" dirty="0">
-                <a:solidFill>
-                  <a:srgbClr val="9DB8AA"/>
-                </a:solidFill>
-                <a:latin typeface="Helvetica" pitchFamily="34" charset="0"/>
-                <a:ea typeface="Helvetica" pitchFamily="34" charset="-122"/>
-                <a:cs typeface="Helvetica" pitchFamily="34" charset="-120"/>
-              </a:rPr>
-              <a:t>Conversa bien pero no está conectado: no agenda, no guarda, no avisa.</a:t>
-            </a:r>
-            <a:endParaRPr lang="en-US" sz="1100" dirty="0"/>
-          </a:p>
-        </p:txBody>
-      </p:sp>
-      <p:sp>
-        <p:nvSpPr>
-          <p:cNvPr id="14" name="Shape 12"/>
-          <p:cNvSpPr/>
-          <p:nvPr/>
-        </p:nvSpPr>
-        <p:spPr>
-          <a:xfrm>
-            <a:off x="6126480" y="1463040"/>
-            <a:ext cx="2651760" cy="2743200"/>
-          </a:xfrm>
-          <a:prstGeom prst="roundRect">
-            <a:avLst>
-              <a:gd name="adj" fmla="val 3448"/>
-            </a:avLst>
-          </a:prstGeom>
-          <a:solidFill>
-            <a:srgbClr val="0D2118"/>
-          </a:solidFill>
-          <a:ln w="25400">
-            <a:solidFill>
-              <a:srgbClr val="E0A93C"/>
-            </a:solidFill>
-            <a:prstDash val="solid"/>
-          </a:ln>
-        </p:spPr>
-      </p:sp>
-      <p:sp>
-        <p:nvSpPr>
-          <p:cNvPr id="15" name="Text 13"/>
-          <p:cNvSpPr/>
-          <p:nvPr/>
-        </p:nvSpPr>
-        <p:spPr>
-          <a:xfrm>
-            <a:off x="6309360" y="1508760"/>
-            <a:ext cx="2286000" cy="274320"/>
-          </a:xfrm>
-          <a:prstGeom prst="rect">
-            <a:avLst/>
-          </a:prstGeom>
-          <a:noFill/>
-          <a:ln/>
-        </p:spPr>
-        <p:txBody>
-          <a:bodyPr wrap="square" rtlCol="0" anchor="ctr"/>
-          <a:lstStyle/>
-          <a:p>
-            <a:pPr indent="0" marL="0">
-              <a:buNone/>
-            </a:pPr>
-            <a:r>
-              <a:rPr lang="en-US" sz="900" b="1" spc="200" kern="0" dirty="0">
-                <a:solidFill>
-                  <a:srgbClr val="E0A93C"/>
-                </a:solidFill>
-                <a:latin typeface="Helvetica" pitchFamily="34" charset="0"/>
-                <a:ea typeface="Helvetica" pitchFamily="34" charset="-122"/>
-                <a:cs typeface="Helvetica" pitchFamily="34" charset="-120"/>
-              </a:rPr>
-              <a:t>LO QUE PROBASTE</a:t>
-            </a:r>
-            <a:endParaRPr lang="en-US" sz="900" dirty="0"/>
-          </a:p>
-        </p:txBody>
-      </p:sp>
-      <p:sp>
-        <p:nvSpPr>
-          <p:cNvPr id="16" name="Text 14"/>
-          <p:cNvSpPr/>
-          <p:nvPr/>
-        </p:nvSpPr>
-        <p:spPr>
-          <a:xfrm>
-            <a:off x="6309360" y="1783080"/>
-            <a:ext cx="2286000" cy="548640"/>
-          </a:xfrm>
-          <a:prstGeom prst="rect">
-            <a:avLst/>
-          </a:prstGeom>
-          <a:noFill/>
-          <a:ln/>
-        </p:spPr>
-        <p:txBody>
-          <a:bodyPr wrap="square" rtlCol="0" anchor="ctr"/>
-          <a:lstStyle/>
-          <a:p>
-            <a:pPr indent="0" marL="0">
-              <a:buNone/>
-            </a:pPr>
-            <a:r>
-              <a:rPr lang="en-US" sz="1500" b="1" dirty="0">
-                <a:solidFill>
-                  <a:srgbClr val="E9F5EE"/>
-                </a:solidFill>
-                <a:latin typeface="Helvetica" pitchFamily="34" charset="0"/>
-                <a:ea typeface="Helvetica" pitchFamily="34" charset="-122"/>
-                <a:cs typeface="Helvetica" pitchFamily="34" charset="-120"/>
-              </a:rPr>
-              <a:t>Agente conectado · AutoFlow</a:t>
-            </a:r>
-            <a:endParaRPr lang="en-US" sz="1500" dirty="0"/>
-          </a:p>
-        </p:txBody>
-      </p:sp>
-      <p:sp>
-        <p:nvSpPr>
-          <p:cNvPr id="17" name="Text 15"/>
-          <p:cNvSpPr/>
-          <p:nvPr/>
-        </p:nvSpPr>
-        <p:spPr>
-          <a:xfrm>
-            <a:off x="6309360" y="2331720"/>
-            <a:ext cx="2286000" cy="365760"/>
-          </a:xfrm>
-          <a:prstGeom prst="rect">
-            <a:avLst/>
-          </a:prstGeom>
-          <a:noFill/>
-          <a:ln/>
-        </p:spPr>
-        <p:txBody>
-          <a:bodyPr wrap="square" rtlCol="0" anchor="ctr"/>
-          <a:lstStyle/>
-          <a:p>
-            <a:pPr indent="0" marL="0">
-              <a:buNone/>
-            </a:pPr>
-            <a:r>
-              <a:rPr lang="en-US" sz="1400" b="1" dirty="0">
-                <a:solidFill>
-                  <a:srgbClr val="35C06F"/>
-                </a:solidFill>
-                <a:latin typeface="Helvetica" pitchFamily="34" charset="0"/>
-                <a:ea typeface="Helvetica" pitchFamily="34" charset="-122"/>
-                <a:cs typeface="Helvetica" pitchFamily="34" charset="-120"/>
-              </a:rPr>
-              <a:t>$2,500–3,000 + $147/mes</a:t>
-            </a:r>
-            <a:endParaRPr lang="en-US" sz="1400" dirty="0"/>
-          </a:p>
-        </p:txBody>
-      </p:sp>
-      <p:sp>
-        <p:nvSpPr>
-          <p:cNvPr id="18" name="Text 16"/>
-          <p:cNvSpPr/>
-          <p:nvPr/>
-        </p:nvSpPr>
-        <p:spPr>
-          <a:xfrm>
-            <a:off x="6309360" y="2743200"/>
-            <a:ext cx="2286000" cy="1280160"/>
-          </a:xfrm>
-          <a:prstGeom prst="rect">
-            <a:avLst/>
-          </a:prstGeom>
-          <a:noFill/>
-          <a:ln/>
-        </p:spPr>
-        <p:txBody>
-          <a:bodyPr wrap="square" rtlCol="0" anchor="t"/>
-          <a:lstStyle/>
-          <a:p>
-            <a:pPr indent="0" marL="0">
-              <a:buNone/>
-            </a:pPr>
-            <a:r>
-              <a:rPr lang="en-US" sz="1100" dirty="0">
-                <a:solidFill>
-                  <a:srgbClr val="9DB8AA"/>
-                </a:solidFill>
-                <a:latin typeface="Helvetica" pitchFamily="34" charset="0"/>
-                <a:ea typeface="Helvetica" pitchFamily="34" charset="-122"/>
-                <a:cs typeface="Helvetica" pitchFamily="34" charset="-120"/>
-              </a:rPr>
-              <a:t>Chat + voz + CRM configurado + agenda. Precalifica y te avisa. Pro $297/mes.</a:t>
-            </a:r>
-            <a:endParaRPr lang="en-US" sz="1100" dirty="0"/>
-          </a:p>
-        </p:txBody>
-      </p:sp>
-      <p:sp>
-        <p:nvSpPr>
-          <p:cNvPr id="19" name="Text 17"/>
-          <p:cNvSpPr/>
-          <p:nvPr/>
-        </p:nvSpPr>
-        <p:spPr>
-          <a:xfrm>
-            <a:off x="548640" y="4297680"/>
-            <a:ext cx="8046720" cy="365760"/>
-          </a:xfrm>
-          <a:prstGeom prst="rect">
-            <a:avLst/>
-          </a:prstGeom>
-          <a:noFill/>
-          <a:ln/>
-        </p:spPr>
-        <p:txBody>
-          <a:bodyPr wrap="square" rtlCol="0" anchor="ctr"/>
-          <a:lstStyle/>
-          <a:p>
-            <a:pPr indent="0" marL="0">
-              <a:buNone/>
-            </a:pPr>
-            <a:r>
-              <a:rPr lang="en-US" sz="1100" dirty="0">
-                <a:solidFill>
-                  <a:srgbClr val="9DB8AA"/>
-                </a:solidFill>
-                <a:latin typeface="Helvetica" pitchFamily="34" charset="0"/>
-                <a:ea typeface="Helvetica" pitchFamily="34" charset="-122"/>
-                <a:cs typeface="Helvetica" pitchFamily="34" charset="-120"/>
-              </a:rPr>
-              <a:t>Garantía: funcionando en 21 días o no corre la mensualidad · sin permanencia · financiable (inicial + 2 pagos a 30 días)</a:t>
-            </a:r>
-            <a:endParaRPr lang="en-US" sz="1100" dirty="0"/>
-          </a:p>
-        </p:txBody>
-      </p:sp>
-    </p:spTree>
-  </p:cSld>
-  <p:clrMapOvr>
-    <a:masterClrMapping/>
-  </p:clrMapOvr>
-</p:sld>
-</file>
-
-<file path=ppt/slides/slide8.xml><?xml version="1.0" encoding="utf-8"?>
-<p:sld xmlns:a="http://schemas.openxmlformats.org/drawingml/2006/main" xmlns:r="http://schemas.openxmlformats.org/officeDocument/2006/relationships" xmlns:p="http://schemas.openxmlformats.org/presentationml/2006/main">
-  <p:cSld name="Slide 8">
-    <p:bg>
-      <p:bgPr>
-        <a:solidFill>
-          <a:srgbClr val="07160F"/>
-        </a:solidFill>
-      </p:bgPr>
-    </p:bg>
-    <p:spTree>
-      <p:nvGrpSpPr>
-        <p:cNvPr id="1" name=""/>
-        <p:cNvGrpSpPr/>
-        <p:nvPr/>
-      </p:nvGrpSpPr>
-      <p:grpSpPr>
-        <a:xfrm>
-          <a:off x="0" y="0"/>
-          <a:ext cx="0" cy="0"/>
-          <a:chOff x="0" y="0"/>
-          <a:chExt cx="0" cy="0"/>
-        </a:xfrm>
-      </p:grpSpPr>
-      <p:sp>
-        <p:nvSpPr>
-          <p:cNvPr id="2" name="Text 0"/>
-          <p:cNvSpPr/>
-          <p:nvPr/>
-        </p:nvSpPr>
-        <p:spPr>
-          <a:xfrm>
-            <a:off x="365760" y="4754880"/>
-            <a:ext cx="3657600" cy="274320"/>
-          </a:xfrm>
-          <a:prstGeom prst="rect">
-            <a:avLst/>
-          </a:prstGeom>
-          <a:noFill/>
-          <a:ln/>
-        </p:spPr>
-        <p:txBody>
-          <a:bodyPr wrap="square" rtlCol="0" anchor="ctr"/>
-          <a:lstStyle/>
-          <a:p>
-            <a:pPr indent="0" marL="0">
-              <a:buNone/>
-            </a:pPr>
-            <a:r>
-              <a:rPr lang="en-US" sz="900" dirty="0">
-                <a:solidFill>
-                  <a:srgbClr val="9DB8AA"/>
-                </a:solidFill>
-                <a:latin typeface="Helvetica" pitchFamily="34" charset="0"/>
-                <a:ea typeface="Helvetica" pitchFamily="34" charset="-122"/>
-                <a:cs typeface="Helvetica" pitchFamily="34" charset="-120"/>
-              </a:rPr>
-              <a:t>AI Borinquen · AutoFlow</a:t>
-            </a:r>
-            <a:endParaRPr lang="en-US" sz="900" dirty="0"/>
-          </a:p>
-        </p:txBody>
-      </p:sp>
-      <p:sp>
-        <p:nvSpPr>
-          <p:cNvPr id="3" name="Text 1"/>
-          <p:cNvSpPr/>
-          <p:nvPr/>
-        </p:nvSpPr>
-        <p:spPr>
-          <a:xfrm>
-            <a:off x="5120640" y="4754880"/>
-            <a:ext cx="3657600" cy="274320"/>
-          </a:xfrm>
-          <a:prstGeom prst="rect">
-            <a:avLst/>
-          </a:prstGeom>
-          <a:noFill/>
-          <a:ln/>
-        </p:spPr>
-        <p:txBody>
-          <a:bodyPr wrap="square" rtlCol="0" anchor="ctr"/>
-          <a:lstStyle/>
-          <a:p>
-            <a:pPr algn="r" indent="0" marL="0">
-              <a:buNone/>
-            </a:pPr>
-            <a:r>
-              <a:rPr lang="en-US" sz="900" dirty="0">
-                <a:solidFill>
-                  <a:srgbClr val="9DB8AA"/>
-                </a:solidFill>
-                <a:latin typeface="Helvetica" pitchFamily="34" charset="0"/>
-                <a:ea typeface="Helvetica" pitchFamily="34" charset="-122"/>
-                <a:cs typeface="Helvetica" pitchFamily="34" charset="-120"/>
-              </a:rPr>
-              <a:t>Skin Clinic PR</a:t>
-            </a:r>
-            <a:endParaRPr lang="en-US" sz="900" dirty="0"/>
-          </a:p>
-        </p:txBody>
-      </p:sp>
-      <p:sp>
-        <p:nvSpPr>
-          <p:cNvPr id="4" name="Text 2"/>
-          <p:cNvSpPr/>
-          <p:nvPr/>
-        </p:nvSpPr>
-        <p:spPr>
-          <a:xfrm>
-            <a:off x="457200" y="320040"/>
-            <a:ext cx="8229600" cy="274320"/>
-          </a:xfrm>
-          <a:prstGeom prst="rect">
-            <a:avLst/>
-          </a:prstGeom>
-          <a:noFill/>
-          <a:ln/>
-        </p:spPr>
-        <p:txBody>
-          <a:bodyPr wrap="square" rtlCol="0" anchor="ctr"/>
-          <a:lstStyle/>
-          <a:p>
-            <a:pPr indent="0" marL="0">
-              <a:buNone/>
-            </a:pPr>
-            <a:r>
-              <a:rPr lang="en-US" sz="1000" b="1" spc="300" kern="0" dirty="0">
-                <a:solidFill>
-                  <a:srgbClr val="35C06F"/>
-                </a:solidFill>
-                <a:latin typeface="Helvetica" pitchFamily="34" charset="0"/>
-                <a:ea typeface="Helvetica" pitchFamily="34" charset="-122"/>
-                <a:cs typeface="Helvetica" pitchFamily="34" charset="-120"/>
-              </a:rPr>
-              <a:t>LA PRIMERA SEMANA</a:t>
-            </a:r>
-            <a:endParaRPr lang="en-US" sz="1000" dirty="0"/>
-          </a:p>
-        </p:txBody>
-      </p:sp>
-      <p:sp>
-        <p:nvSpPr>
-          <p:cNvPr id="5" name="Text 3"/>
-          <p:cNvSpPr/>
-          <p:nvPr/>
-        </p:nvSpPr>
-        <p:spPr>
-          <a:xfrm>
-            <a:off x="457200" y="594360"/>
-            <a:ext cx="8229600" cy="731520"/>
-          </a:xfrm>
-          <a:prstGeom prst="rect">
-            <a:avLst/>
-          </a:prstGeom>
-          <a:noFill/>
-          <a:ln/>
-        </p:spPr>
-        <p:txBody>
-          <a:bodyPr wrap="square" rtlCol="0" anchor="ctr"/>
-          <a:lstStyle/>
-          <a:p>
-            <a:pPr indent="0" marL="0">
-              <a:buNone/>
-            </a:pPr>
-            <a:r>
-              <a:rPr lang="en-US" sz="2800" b="1" dirty="0">
-                <a:solidFill>
-                  <a:srgbClr val="E9F5EE"/>
-                </a:solidFill>
-                <a:latin typeface="Helvetica" pitchFamily="34" charset="0"/>
-                <a:ea typeface="Helvetica" pitchFamily="34" charset="-122"/>
-                <a:cs typeface="Helvetica" pitchFamily="34" charset="-120"/>
-              </a:rPr>
-              <a:t>Qué pasa desde que dices que sí</a:t>
-            </a:r>
-            <a:endParaRPr lang="en-US" sz="2800" dirty="0"/>
-          </a:p>
-        </p:txBody>
-      </p:sp>
-      <p:sp>
-        <p:nvSpPr>
-          <p:cNvPr id="6" name="Text 4"/>
-          <p:cNvSpPr/>
-          <p:nvPr/>
-        </p:nvSpPr>
-        <p:spPr>
-          <a:xfrm>
-            <a:off x="548640" y="1463040"/>
-            <a:ext cx="8046720" cy="3017520"/>
-          </a:xfrm>
-          <a:prstGeom prst="rect">
-            <a:avLst/>
-          </a:prstGeom>
-          <a:noFill/>
-          <a:ln/>
-        </p:spPr>
-        <p:txBody>
-          <a:bodyPr wrap="square" rtlCol="0" anchor="t"/>
-          <a:lstStyle/>
-          <a:p>
-            <a:pPr marL="342900" indent="-342900">
-              <a:spcAft>
-                <a:spcPts val="800"/>
-              </a:spcAft>
-              <a:buSzPct val="100000"/>
-              <a:buChar char="●"/>
-            </a:pPr>
-            <a:r>
-              <a:rPr lang="en-US" sz="1600" dirty="0">
-                <a:solidFill>
-                  <a:srgbClr val="E9F5EE"/>
-                </a:solidFill>
-                <a:latin typeface="Helvetica" pitchFamily="34" charset="0"/>
-                <a:ea typeface="Helvetica" pitchFamily="34" charset="-122"/>
-                <a:cs typeface="Helvetica" pitchFamily="34" charset="-120"/>
-              </a:rPr>
-              <a:t>Instalacion del sistema con el numero de WhatsApp actual de la clinica</a:t>
-            </a:r>
-            <a:endParaRPr lang="en-US" sz="1600" dirty="0"/>
-          </a:p>
-          <a:p>
-            <a:pPr marL="342900" indent="-342900">
-              <a:spcAft>
-                <a:spcPts val="800"/>
-              </a:spcAft>
-              <a:buSzPct val="100000"/>
-              <a:buChar char="●"/>
-            </a:pPr>
-            <a:r>
-              <a:rPr lang="en-US" sz="1600" dirty="0">
-                <a:solidFill>
-                  <a:srgbClr val="E9F5EE"/>
-                </a:solidFill>
-                <a:latin typeface="Helvetica" pitchFamily="34" charset="0"/>
-                <a:ea typeface="Helvetica" pitchFamily="34" charset="-122"/>
-                <a:cs typeface="Helvetica" pitchFamily="34" charset="-120"/>
-              </a:rPr>
-              <a:t>Entrenamiento del asistente con los servicios reales: faciales, botox, rellenos, laser, dermatologia</a:t>
-            </a:r>
-            <a:endParaRPr lang="en-US" sz="1600" dirty="0"/>
-          </a:p>
-          <a:p>
-            <a:pPr marL="342900" indent="-342900">
-              <a:spcAft>
-                <a:spcPts val="800"/>
-              </a:spcAft>
-              <a:buSzPct val="100000"/>
-              <a:buChar char="●"/>
-            </a:pPr>
-            <a:r>
-              <a:rPr lang="en-US" sz="1600" dirty="0">
-                <a:solidFill>
-                  <a:srgbClr val="E9F5EE"/>
-                </a:solidFill>
-                <a:latin typeface="Helvetica" pitchFamily="34" charset="0"/>
-                <a:ea typeface="Helvetica" pitchFamily="34" charset="-122"/>
-                <a:cs typeface="Helvetica" pitchFamily="34" charset="-120"/>
-              </a:rPr>
-              <a:t>Prueba en vivo respondiendo mensajes y llamadas de ejemplo</a:t>
-            </a:r>
-            <a:endParaRPr lang="en-US" sz="1600" dirty="0"/>
-          </a:p>
-          <a:p>
-            <a:pPr marL="342900" indent="-342900">
-              <a:spcAft>
-                <a:spcPts val="800"/>
-              </a:spcAft>
-              <a:buSzPct val="100000"/>
-              <a:buChar char="●"/>
-            </a:pPr>
-            <a:r>
-              <a:rPr lang="en-US" sz="1600" dirty="0">
-                <a:solidFill>
-                  <a:srgbClr val="E9F5EE"/>
-                </a:solidFill>
-                <a:latin typeface="Helvetica" pitchFamily="34" charset="0"/>
-                <a:ea typeface="Helvetica" pitchFamily="34" charset="-122"/>
-                <a:cs typeface="Helvetica" pitchFamily="34" charset="-120"/>
-              </a:rPr>
-              <a:t>Ajustes finales segun el flujo de trabajo de la recepcion</a:t>
-            </a:r>
-            <a:endParaRPr lang="en-US" sz="1600" dirty="0"/>
-          </a:p>
-        </p:txBody>
-      </p:sp>
-    </p:spTree>
-  </p:cSld>
-  <p:clrMapOvr>
-    <a:masterClrMapping/>
-  </p:clrMapOvr>
-</p:sld>
-</file>
-
-<file path=ppt/slides/slide9.xml><?xml version="1.0" encoding="utf-8"?>
-<p:sld xmlns:a="http://schemas.openxmlformats.org/drawingml/2006/main" xmlns:r="http://schemas.openxmlformats.org/officeDocument/2006/relationships" xmlns:p="http://schemas.openxmlformats.org/presentationml/2006/main">
-  <p:cSld name="Slide 9">
-    <p:bg>
-      <p:bgPr>
-        <a:solidFill>
-          <a:srgbClr val="07160F"/>
-        </a:solidFill>
-      </p:bgPr>
-    </p:bg>
-    <p:spTree>
-      <p:nvGrpSpPr>
-        <p:cNvPr id="1" name=""/>
-        <p:cNvGrpSpPr/>
-        <p:nvPr/>
-      </p:nvGrpSpPr>
-      <p:grpSpPr>
-        <a:xfrm>
-          <a:off x="0" y="0"/>
-          <a:ext cx="0" cy="0"/>
-          <a:chOff x="0" y="0"/>
-          <a:chExt cx="0" cy="0"/>
-        </a:xfrm>
-      </p:grpSpPr>
-      <p:sp>
-        <p:nvSpPr>
-          <p:cNvPr id="2" name="Text 0"/>
-          <p:cNvSpPr/>
-          <p:nvPr/>
-        </p:nvSpPr>
-        <p:spPr>
-          <a:xfrm>
-            <a:off x="365760" y="4754880"/>
-            <a:ext cx="3657600" cy="274320"/>
-          </a:xfrm>
-          <a:prstGeom prst="rect">
-            <a:avLst/>
-          </a:prstGeom>
-          <a:noFill/>
-          <a:ln/>
-        </p:spPr>
-        <p:txBody>
-          <a:bodyPr wrap="square" rtlCol="0" anchor="ctr"/>
-          <a:lstStyle/>
-          <a:p>
-            <a:pPr indent="0" marL="0">
-              <a:buNone/>
-            </a:pPr>
-            <a:r>
-              <a:rPr lang="en-US" sz="900" dirty="0">
-                <a:solidFill>
-                  <a:srgbClr val="9DB8AA"/>
-                </a:solidFill>
-                <a:latin typeface="Helvetica" pitchFamily="34" charset="0"/>
-                <a:ea typeface="Helvetica" pitchFamily="34" charset="-122"/>
-                <a:cs typeface="Helvetica" pitchFamily="34" charset="-120"/>
-              </a:rPr>
-              <a:t>AI Borinquen · AutoFlow</a:t>
-            </a:r>
-            <a:endParaRPr lang="en-US" sz="900" dirty="0"/>
-          </a:p>
-        </p:txBody>
-      </p:sp>
-      <p:sp>
-        <p:nvSpPr>
-          <p:cNvPr id="3" name="Text 1"/>
-          <p:cNvSpPr/>
-          <p:nvPr/>
-        </p:nvSpPr>
-        <p:spPr>
-          <a:xfrm>
-            <a:off x="5120640" y="4754880"/>
-            <a:ext cx="3657600" cy="274320"/>
-          </a:xfrm>
-          <a:prstGeom prst="rect">
-            <a:avLst/>
-          </a:prstGeom>
-          <a:noFill/>
-          <a:ln/>
-        </p:spPr>
-        <p:txBody>
-          <a:bodyPr wrap="square" rtlCol="0" anchor="ctr"/>
-          <a:lstStyle/>
-          <a:p>
-            <a:pPr algn="r" indent="0" marL="0">
-              <a:buNone/>
-            </a:pPr>
-            <a:r>
-              <a:rPr lang="en-US" sz="900" dirty="0">
-                <a:solidFill>
-                  <a:srgbClr val="9DB8AA"/>
-                </a:solidFill>
-                <a:latin typeface="Helvetica" pitchFamily="34" charset="0"/>
-                <a:ea typeface="Helvetica" pitchFamily="34" charset="-122"/>
-                <a:cs typeface="Helvetica" pitchFamily="34" charset="-120"/>
-              </a:rPr>
-              <a:t>Skin Clinic PR</a:t>
-            </a:r>
-            <a:endParaRPr lang="en-US" sz="900" dirty="0"/>
-          </a:p>
-        </p:txBody>
-      </p:sp>
-      <p:sp>
-        <p:nvSpPr>
-          <p:cNvPr id="4" name="Shape 2"/>
-          <p:cNvSpPr/>
-          <p:nvPr/>
-        </p:nvSpPr>
-        <p:spPr>
-          <a:xfrm>
-            <a:off x="0" y="0"/>
-            <a:ext cx="228600" cy="5143500"/>
-          </a:xfrm>
-          <a:prstGeom prst="rect">
-            <a:avLst/>
-          </a:prstGeom>
-          <a:solidFill>
-            <a:srgbClr val="B76E79"/>
-          </a:solidFill>
-          <a:ln/>
-        </p:spPr>
-      </p:sp>
-      <p:sp>
-        <p:nvSpPr>
-          <p:cNvPr id="5" name="Text 3"/>
-          <p:cNvSpPr/>
-          <p:nvPr/>
-        </p:nvSpPr>
-        <p:spPr>
-          <a:xfrm>
-            <a:off x="548640" y="1280160"/>
-            <a:ext cx="8229600" cy="274320"/>
-          </a:xfrm>
-          <a:prstGeom prst="rect">
-            <a:avLst/>
-          </a:prstGeom>
-          <a:noFill/>
-          <a:ln/>
-        </p:spPr>
-        <p:txBody>
-          <a:bodyPr wrap="square" rtlCol="0" anchor="ctr"/>
-          <a:lstStyle/>
-          <a:p>
-            <a:pPr indent="0" marL="0">
-              <a:buNone/>
-            </a:pPr>
-            <a:r>
-              <a:rPr lang="en-US" sz="1000" b="1" spc="300" kern="0" dirty="0">
-                <a:solidFill>
-                  <a:srgbClr val="35C06F"/>
-                </a:solidFill>
-                <a:latin typeface="Helvetica" pitchFamily="34" charset="0"/>
-                <a:ea typeface="Helvetica" pitchFamily="34" charset="-122"/>
-                <a:cs typeface="Helvetica" pitchFamily="34" charset="-120"/>
-              </a:rPr>
-              <a:t>PRÓXIMO PASO</a:t>
-            </a:r>
-            <a:endParaRPr lang="en-US" sz="1000" dirty="0"/>
-          </a:p>
-        </p:txBody>
-      </p:sp>
-      <p:sp>
-        <p:nvSpPr>
-          <p:cNvPr id="6" name="Text 4"/>
-          <p:cNvSpPr/>
-          <p:nvPr/>
-        </p:nvSpPr>
-        <p:spPr>
-          <a:xfrm>
-            <a:off x="548640" y="1645920"/>
-            <a:ext cx="7863840" cy="1280160"/>
-          </a:xfrm>
-          <a:prstGeom prst="rect">
-            <a:avLst/>
-          </a:prstGeom>
-          <a:noFill/>
-          <a:ln/>
-        </p:spPr>
-        <p:txBody>
-          <a:bodyPr wrap="square" rtlCol="0" anchor="ctr"/>
-          <a:lstStyle/>
-          <a:p>
-            <a:pPr indent="0" marL="0">
-              <a:buNone/>
-            </a:pPr>
-            <a:r>
-              <a:rPr lang="en-US" sz="2400" b="1" dirty="0">
-                <a:solidFill>
-                  <a:srgbClr val="E9F5EE"/>
-                </a:solidFill>
-                <a:latin typeface="Helvetica" pitchFamily="34" charset="0"/>
-                <a:ea typeface="Helvetica" pitchFamily="34" charset="-122"/>
-                <a:cs typeface="Helvetica" pitchFamily="34" charset="-120"/>
-              </a:rPr>
-              <a:t>Agendar la instalacion del sistema con el numero de WhatsApp de Skin Clinic PR.</a:t>
-            </a:r>
-            <a:endParaRPr lang="en-US" sz="2400" dirty="0"/>
-          </a:p>
-        </p:txBody>
-      </p:sp>
-      <p:sp>
-        <p:nvSpPr>
-          <p:cNvPr id="7" name="Text 5"/>
-          <p:cNvSpPr/>
-          <p:nvPr/>
-        </p:nvSpPr>
-        <p:spPr>
-          <a:xfrm>
-            <a:off x="548640" y="3200400"/>
-            <a:ext cx="7863840" cy="457200"/>
-          </a:xfrm>
-          <a:prstGeom prst="rect">
-            <a:avLst/>
-          </a:prstGeom>
-          <a:noFill/>
-          <a:ln/>
-        </p:spPr>
-        <p:txBody>
-          <a:bodyPr wrap="square" rtlCol="0" anchor="ctr"/>
-          <a:lstStyle/>
-          <a:p>
-            <a:pPr indent="0" marL="0">
-              <a:buNone/>
-            </a:pPr>
-            <a:r>
-              <a:rPr lang="en-US" sz="1300" dirty="0">
-                <a:solidFill>
-                  <a:srgbClr val="9DB8AA"/>
-                </a:solidFill>
-                <a:latin typeface="Helvetica" pitchFamily="34" charset="0"/>
-                <a:ea typeface="Helvetica" pitchFamily="34" charset="-122"/>
-                <a:cs typeface="Helvetica" pitchFamily="34" charset="-120"/>
-              </a:rPr>
-              <a:t>WhatsApp AI Borinquen · +1 (939) 304-0491 · (link al MVP)</a:t>
-            </a:r>
-            <a:endParaRPr lang="en-US" sz="1300" dirty="0"/>
-          </a:p>
-        </p:txBody>
-      </p:sp>
     </p:spTree>
   </p:cSld>
   <p:clrMapOvr>
